--- a/docs/Progress_Update_2D_full.pptx
+++ b/docs/Progress_Update_2D_full.pptx
@@ -3142,7 +3142,7 @@
         <p:spPr>
           <a:xfrm>
             <a:off x="0" y="0"/>
-            <a:ext cx="12191695" cy="1572768"/>
+            <a:ext cx="12191695" cy="1389888"/>
           </a:xfrm>
           <a:prstGeom prst="rect">
             <a:avLst/>
@@ -3184,8 +3184,8 @@
         </p:nvSpPr>
         <p:spPr>
           <a:xfrm>
-            <a:off x="0" y="1572768"/>
-            <a:ext cx="12191695" cy="73152"/>
+            <a:off x="0" y="1389888"/>
+            <a:ext cx="12191695" cy="64008"/>
           </a:xfrm>
           <a:prstGeom prst="rect">
             <a:avLst/>
@@ -3227,8 +3227,8 @@
         </p:nvSpPr>
         <p:spPr>
           <a:xfrm>
-            <a:off x="457200" y="164592"/>
-            <a:ext cx="11247120" cy="292608"/>
+            <a:off x="457200" y="109728"/>
+            <a:ext cx="11247120" cy="256032"/>
           </a:xfrm>
           <a:prstGeom prst="rect">
             <a:avLst/>
@@ -3248,7 +3248,7 @@
                 </a:solidFill>
                 <a:latin typeface="Calibri"/>
               </a:rPr>
-              <a:t>PROGRESS UPDATE   ·   SINGLE INTEL REALSENSE D455f</a:t>
+              <a:t>SLIDE 1   ·   PROBLEM STATEMENT  &amp;  PROJECT OBJECTIVE</a:t>
             </a:r>
           </a:p>
         </p:txBody>
@@ -3261,8 +3261,8 @@
         </p:nvSpPr>
         <p:spPr>
           <a:xfrm>
-            <a:off x="457200" y="438912"/>
-            <a:ext cx="11247120" cy="640080"/>
+            <a:off x="457200" y="347472"/>
+            <a:ext cx="11247120" cy="566928"/>
           </a:xfrm>
           <a:prstGeom prst="rect">
             <a:avLst/>
@@ -3276,13 +3276,13 @@
           <a:lstStyle/>
           <a:p>
             <a:r>
-              <a:rPr sz="3200" b="1">
+              <a:rPr sz="2600" b="1">
                 <a:solidFill>
                   <a:srgbClr val="FFFFFF"/>
                 </a:solidFill>
                 <a:latin typeface="Calibri"/>
               </a:rPr>
-              <a:t>2D and 3D Motion Analysis</a:t>
+              <a:t>2D &amp; 3D Motion Analysis Using a Single RGB-D Camera</a:t>
             </a:r>
           </a:p>
         </p:txBody>
@@ -3295,8 +3295,8 @@
         </p:nvSpPr>
         <p:spPr>
           <a:xfrm>
-            <a:off x="457200" y="1060704"/>
-            <a:ext cx="11247120" cy="365760"/>
+            <a:off x="457200" y="932688"/>
+            <a:ext cx="11247120" cy="329184"/>
           </a:xfrm>
           <a:prstGeom prst="rect">
             <a:avLst/>
@@ -3310,13 +3310,13 @@
           <a:lstStyle/>
           <a:p>
             <a:r>
-              <a:rPr sz="1500" b="0">
+              <a:rPr sz="1400" b="0">
                 <a:solidFill>
                   <a:srgbClr val="C5D4E8"/>
                 </a:solidFill>
                 <a:latin typeface="Calibri"/>
               </a:rPr>
-              <a:t>Problem statement   ·   Assigned: 2D + 3D    |    Delivered this phase: 2D only</a:t>
+              <a:t>Intel RealSense D455f   ·   compact, real-time, single-camera motion analysis</a:t>
             </a:r>
           </a:p>
         </p:txBody>
@@ -3329,8 +3329,8 @@
         </p:nvSpPr>
         <p:spPr>
           <a:xfrm>
-            <a:off x="411480" y="1901952"/>
-            <a:ext cx="3703320" cy="4160520"/>
+            <a:off x="347472" y="1609344"/>
+            <a:ext cx="7699248" cy="1298448"/>
           </a:xfrm>
           <a:prstGeom prst="roundRect">
             <a:avLst>
@@ -3376,14 +3376,14 @@
         </p:nvSpPr>
         <p:spPr>
           <a:xfrm>
-            <a:off x="411480" y="1901952"/>
-            <a:ext cx="3703320" cy="91440"/>
-          </a:xfrm>
-          <a:prstGeom prst="rect">
-            <a:avLst/>
-          </a:prstGeom>
-          <a:solidFill>
-            <a:srgbClr val="1FB5A6"/>
+            <a:off x="347472" y="1609344"/>
+            <a:ext cx="91440" cy="1298448"/>
+          </a:xfrm>
+          <a:prstGeom prst="rect">
+            <a:avLst/>
+          </a:prstGeom>
+          <a:solidFill>
+            <a:srgbClr val="E06C5C"/>
           </a:solidFill>
           <a:ln>
             <a:noFill/>
@@ -3419,8 +3419,8 @@
         </p:nvSpPr>
         <p:spPr>
           <a:xfrm>
-            <a:off x="612648" y="2157984"/>
-            <a:ext cx="3337560" cy="384048"/>
+            <a:off x="603504" y="1700784"/>
+            <a:ext cx="7296912" cy="256032"/>
           </a:xfrm>
           <a:prstGeom prst="rect">
             <a:avLst/>
@@ -3434,13 +3434,13 @@
           <a:lstStyle/>
           <a:p>
             <a:r>
-              <a:rPr sz="1300" b="1">
-                <a:solidFill>
-                  <a:srgbClr val="1FB5A6"/>
+              <a:rPr sz="1200" b="1">
+                <a:solidFill>
+                  <a:srgbClr val="E06C5C"/>
                 </a:solidFill>
                 <a:latin typeface="Calibri"/>
               </a:rPr>
-              <a:t>01   THE ASSIGNMENT</a:t>
+              <a:t>PROBLEM STATEMENT</a:t>
             </a:r>
           </a:p>
         </p:txBody>
@@ -3453,8 +3453,8 @@
         </p:nvSpPr>
         <p:spPr>
           <a:xfrm>
-            <a:off x="612648" y="2560320"/>
-            <a:ext cx="3337560" cy="777240"/>
+            <a:off x="603504" y="1975104"/>
+            <a:ext cx="7260336" cy="841248"/>
           </a:xfrm>
           <a:prstGeom prst="rect">
             <a:avLst/>
@@ -3468,114 +3468,27 @@
           <a:lstStyle/>
           <a:p>
             <a:r>
-              <a:rPr sz="1500" b="1">
+              <a:rPr sz="1300" b="0">
                 <a:solidFill>
                   <a:srgbClr val="1A2332"/>
                 </a:solidFill>
                 <a:latin typeface="Calibri"/>
               </a:rPr>
-              <a:t>Measure human motion with one RGB-D camera.</a:t>
-            </a:r>
-          </a:p>
-        </p:txBody>
-      </p:sp>
-      <p:sp>
-        <p:nvSpPr>
-          <p:cNvPr id="12" name="TextBox 11"/>
-          <p:cNvSpPr txBox="1"/>
-          <p:nvPr/>
-        </p:nvSpPr>
-        <p:spPr>
-          <a:xfrm>
-            <a:off x="612648" y="3383280"/>
-            <a:ext cx="3337560" cy="2468880"/>
-          </a:xfrm>
-          <a:prstGeom prst="rect">
-            <a:avLst/>
-          </a:prstGeom>
-          <a:noFill/>
-        </p:spPr>
-        <p:txBody>
-          <a:bodyPr wrap="square">
-            <a:spAutoFit/>
-          </a:bodyPr>
-          <a:lstStyle/>
-          <a:p>
-            <a:pPr>
-              <a:spcAft>
-                <a:spcPts val="1000"/>
-              </a:spcAft>
-            </a:pPr>
-            <a:r>
-              <a:rPr sz="1400" b="0">
-                <a:solidFill>
-                  <a:srgbClr val="5A6678"/>
-                </a:solidFill>
-                <a:latin typeface="Calibri"/>
-              </a:rPr>
-              <a:t>▸  Hardware: Intel RealSense D455f</a:t>
-            </a:r>
-          </a:p>
-          <a:p>
-            <a:pPr>
-              <a:spcAft>
-                <a:spcPts val="1000"/>
-              </a:spcAft>
-            </a:pPr>
-            <a:r>
-              <a:rPr sz="1400" b="0">
-                <a:solidFill>
-                  <a:srgbClr val="5A6678"/>
-                </a:solidFill>
-                <a:latin typeface="Calibri"/>
-              </a:rPr>
-              <a:t>▸  Live USB  and  uploaded video</a:t>
-            </a:r>
-          </a:p>
-          <a:p>
-            <a:pPr>
-              <a:spcAft>
-                <a:spcPts val="1000"/>
-              </a:spcAft>
-            </a:pPr>
-            <a:r>
-              <a:rPr sz="1400" b="0">
-                <a:solidFill>
-                  <a:srgbClr val="5A6678"/>
-                </a:solidFill>
-                <a:latin typeface="Calibri"/>
-              </a:rPr>
-              <a:t>▸  Camera coordinates (image pixels)</a:t>
-            </a:r>
-          </a:p>
-          <a:p>
-            <a:pPr>
-              <a:spcAft>
-                <a:spcPts val="1000"/>
-              </a:spcAft>
-            </a:pPr>
-            <a:r>
-              <a:rPr sz="1400" b="0">
-                <a:solidFill>
-                  <a:srgbClr val="5A6678"/>
-                </a:solidFill>
-                <a:latin typeface="Calibri"/>
-              </a:rPr>
-              <a:t>▸  No hardcoding — config.yaml</a:t>
-            </a:r>
-          </a:p>
-        </p:txBody>
-      </p:sp>
-      <p:sp>
-        <p:nvSpPr>
-          <p:cNvPr id="13" name="Rounded Rectangle 12"/>
+              <a:t>Traditional motion-analysis systems often rely on expensive multi-camera motion-capture setups or specialized sensors. There is a need for a compact, real-time and accessible system that can capture human movement and extract meaningful joint-level motion data using a single camera.</a:t>
+            </a:r>
+          </a:p>
+        </p:txBody>
+      </p:sp>
+      <p:sp>
+        <p:nvSpPr>
+          <p:cNvPr id="12" name="Rounded Rectangle 11"/>
           <p:cNvSpPr/>
           <p:nvPr/>
         </p:nvSpPr>
         <p:spPr>
           <a:xfrm>
-            <a:off x="4315968" y="1901952"/>
-            <a:ext cx="3703320" cy="4160520"/>
+            <a:off x="347472" y="3017520"/>
+            <a:ext cx="7699248" cy="1627632"/>
           </a:xfrm>
           <a:prstGeom prst="roundRect">
             <a:avLst>
@@ -3615,20 +3528,20 @@
       </p:sp>
       <p:sp>
         <p:nvSpPr>
-          <p:cNvPr id="14" name="Rectangle 13"/>
+          <p:cNvPr id="13" name="Rectangle 12"/>
           <p:cNvSpPr/>
           <p:nvPr/>
         </p:nvSpPr>
         <p:spPr>
           <a:xfrm>
-            <a:off x="4315968" y="1901952"/>
-            <a:ext cx="3703320" cy="91440"/>
-          </a:xfrm>
-          <a:prstGeom prst="rect">
-            <a:avLst/>
-          </a:prstGeom>
-          <a:solidFill>
-            <a:srgbClr val="E8A338"/>
+            <a:off x="347472" y="3017520"/>
+            <a:ext cx="91440" cy="1627632"/>
+          </a:xfrm>
+          <a:prstGeom prst="rect">
+            <a:avLst/>
+          </a:prstGeom>
+          <a:solidFill>
+            <a:srgbClr val="1FB5A6"/>
           </a:solidFill>
           <a:ln>
             <a:noFill/>
@@ -3658,14 +3571,14 @@
       </p:sp>
       <p:sp>
         <p:nvSpPr>
-          <p:cNvPr id="15" name="TextBox 14"/>
+          <p:cNvPr id="14" name="TextBox 13"/>
           <p:cNvSpPr txBox="1"/>
           <p:nvPr/>
         </p:nvSpPr>
         <p:spPr>
           <a:xfrm>
-            <a:off x="4517136" y="2157984"/>
-            <a:ext cx="3337560" cy="384048"/>
+            <a:off x="603504" y="3108960"/>
+            <a:ext cx="7296912" cy="256032"/>
           </a:xfrm>
           <a:prstGeom prst="rect">
             <a:avLst/>
@@ -3679,27 +3592,27 @@
           <a:lstStyle/>
           <a:p>
             <a:r>
-              <a:rPr sz="1300" b="1">
-                <a:solidFill>
-                  <a:srgbClr val="E8A338"/>
+              <a:rPr sz="1200" b="1">
+                <a:solidFill>
+                  <a:srgbClr val="1FB5A6"/>
                 </a:solidFill>
                 <a:latin typeface="Calibri"/>
               </a:rPr>
-              <a:t>02   THIS PHASE</a:t>
-            </a:r>
-          </a:p>
-        </p:txBody>
-      </p:sp>
-      <p:sp>
-        <p:nvSpPr>
-          <p:cNvPr id="16" name="TextBox 15"/>
+              <a:t>PROJECT OBJECTIVE</a:t>
+            </a:r>
+          </a:p>
+        </p:txBody>
+      </p:sp>
+      <p:sp>
+        <p:nvSpPr>
+          <p:cNvPr id="15" name="TextBox 14"/>
           <p:cNvSpPr txBox="1"/>
           <p:nvPr/>
         </p:nvSpPr>
         <p:spPr>
           <a:xfrm>
-            <a:off x="4517136" y="2560320"/>
-            <a:ext cx="3337560" cy="777240"/>
+            <a:off x="603504" y="3383280"/>
+            <a:ext cx="7260336" cy="1188720"/>
           </a:xfrm>
           <a:prstGeom prst="rect">
             <a:avLst/>
@@ -3712,115 +3625,81 @@
           </a:bodyPr>
           <a:lstStyle/>
           <a:p>
-            <a:r>
-              <a:rPr sz="1500" b="1">
+            <a:pPr>
+              <a:spcAft>
+                <a:spcPts val="500"/>
+              </a:spcAft>
+            </a:pPr>
+            <a:r>
+              <a:rPr sz="1300" b="0">
                 <a:solidFill>
                   <a:srgbClr val="1A2332"/>
                 </a:solidFill>
                 <a:latin typeface="Calibri"/>
               </a:rPr>
-              <a:t>Full problem is 2D + 3D. We completed 2D.</a:t>
-            </a:r>
-          </a:p>
-        </p:txBody>
-      </p:sp>
-      <p:sp>
-        <p:nvSpPr>
-          <p:cNvPr id="17" name="TextBox 16"/>
-          <p:cNvSpPr txBox="1"/>
-          <p:nvPr/>
-        </p:nvSpPr>
-        <p:spPr>
-          <a:xfrm>
-            <a:off x="4517136" y="3383280"/>
-            <a:ext cx="3337560" cy="2468880"/>
-          </a:xfrm>
-          <a:prstGeom prst="rect">
-            <a:avLst/>
-          </a:prstGeom>
-          <a:noFill/>
-        </p:spPr>
-        <p:txBody>
-          <a:bodyPr wrap="square">
-            <a:spAutoFit/>
-          </a:bodyPr>
-          <a:lstStyle/>
+              <a:t>▸   Develop a 2D + 3D human motion analysis system using a single Intel RealSense D455f</a:t>
+            </a:r>
+          </a:p>
           <a:p>
             <a:pPr>
               <a:spcAft>
-                <a:spcPts val="1000"/>
+                <a:spcPts val="500"/>
               </a:spcAft>
             </a:pPr>
             <a:r>
-              <a:rPr sz="1400" b="0">
-                <a:solidFill>
-                  <a:srgbClr val="5A6678"/>
+              <a:rPr sz="1300" b="0">
+                <a:solidFill>
+                  <a:srgbClr val="1A2332"/>
                 </a:solidFill>
                 <a:latin typeface="Calibri"/>
               </a:rPr>
-              <a:t>▸  2D = colour frame → joint pixels (u, v)</a:t>
+              <a:t>▸   Detect human body joints and quantify movement parameters</a:t>
             </a:r>
           </a:p>
           <a:p>
             <a:pPr>
               <a:spcAft>
-                <a:spcPts val="1000"/>
+                <a:spcPts val="500"/>
               </a:spcAft>
             </a:pPr>
             <a:r>
-              <a:rPr sz="1400" b="0">
-                <a:solidFill>
-                  <a:srgbClr val="5A6678"/>
+              <a:rPr sz="1300" b="0">
+                <a:solidFill>
+                  <a:srgbClr val="1A2332"/>
                 </a:solidFill>
                 <a:latin typeface="Calibri"/>
               </a:rPr>
-              <a:t>▸  Origin: top-left of the RGB image</a:t>
+              <a:t>▸   Support both live camera input and recorded video</a:t>
             </a:r>
           </a:p>
           <a:p>
             <a:pPr>
               <a:spcAft>
-                <a:spcPts val="1000"/>
+                <a:spcPts val="500"/>
               </a:spcAft>
             </a:pPr>
             <a:r>
-              <a:rPr sz="1400" b="0">
-                <a:solidFill>
-                  <a:srgbClr val="5A6678"/>
+              <a:rPr sz="1300" b="0">
+                <a:solidFill>
+                  <a:srgbClr val="1A2332"/>
                 </a:solidFill>
                 <a:latin typeface="Calibri"/>
               </a:rPr>
-              <a:t>▸  3D (depth → metres) is not built yet</a:t>
-            </a:r>
-          </a:p>
-          <a:p>
-            <a:pPr>
-              <a:spcAft>
-                <a:spcPts val="1000"/>
-              </a:spcAft>
-            </a:pPr>
-            <a:r>
-              <a:rPr sz="1400" b="0">
-                <a:solidFill>
-                  <a:srgbClr val="5A6678"/>
-                </a:solidFill>
-                <a:latin typeface="Calibri"/>
-              </a:rPr>
-              <a:t>▸  Student prototype — not a medical device</a:t>
-            </a:r>
-          </a:p>
-        </p:txBody>
-      </p:sp>
-      <p:sp>
-        <p:nvSpPr>
-          <p:cNvPr id="18" name="Rounded Rectangle 17"/>
+              <a:t>▸   Provide a foundation for real-world 3D motion measurement</a:t>
+            </a:r>
+          </a:p>
+        </p:txBody>
+      </p:sp>
+      <p:sp>
+        <p:nvSpPr>
+          <p:cNvPr id="16" name="Rounded Rectangle 15"/>
           <p:cNvSpPr/>
           <p:nvPr/>
         </p:nvSpPr>
         <p:spPr>
           <a:xfrm>
-            <a:off x="8220456" y="1901952"/>
-            <a:ext cx="3703320" cy="4160520"/>
+            <a:off x="347472" y="4754880"/>
+            <a:ext cx="7699248" cy="1719072"/>
           </a:xfrm>
           <a:prstGeom prst="roundRect">
             <a:avLst>
@@ -3860,20 +3739,20 @@
       </p:sp>
       <p:sp>
         <p:nvSpPr>
-          <p:cNvPr id="19" name="Rectangle 18"/>
+          <p:cNvPr id="17" name="Rectangle 16"/>
           <p:cNvSpPr/>
           <p:nvPr/>
         </p:nvSpPr>
         <p:spPr>
           <a:xfrm>
-            <a:off x="8220456" y="1901952"/>
-            <a:ext cx="3703320" cy="91440"/>
-          </a:xfrm>
-          <a:prstGeom prst="rect">
-            <a:avLst/>
-          </a:prstGeom>
-          <a:solidFill>
-            <a:srgbClr val="E06C5C"/>
+            <a:off x="347472" y="4754880"/>
+            <a:ext cx="91440" cy="1719072"/>
+          </a:xfrm>
+          <a:prstGeom prst="rect">
+            <a:avLst/>
+          </a:prstGeom>
+          <a:solidFill>
+            <a:srgbClr val="E8A338"/>
           </a:solidFill>
           <a:ln>
             <a:noFill/>
@@ -3903,14 +3782,14 @@
       </p:sp>
       <p:sp>
         <p:nvSpPr>
-          <p:cNvPr id="20" name="TextBox 19"/>
+          <p:cNvPr id="18" name="TextBox 17"/>
           <p:cNvSpPr txBox="1"/>
           <p:nvPr/>
         </p:nvSpPr>
         <p:spPr>
           <a:xfrm>
-            <a:off x="8421624" y="2157984"/>
-            <a:ext cx="3337560" cy="384048"/>
+            <a:off x="603504" y="4846320"/>
+            <a:ext cx="7296912" cy="256032"/>
           </a:xfrm>
           <a:prstGeom prst="rect">
             <a:avLst/>
@@ -3924,27 +3803,27 @@
           <a:lstStyle/>
           <a:p>
             <a:r>
-              <a:rPr sz="1300" b="1">
-                <a:solidFill>
-                  <a:srgbClr val="E06C5C"/>
+              <a:rPr sz="1200" b="1">
+                <a:solidFill>
+                  <a:srgbClr val="E8A338"/>
                 </a:solidFill>
                 <a:latin typeface="Calibri"/>
               </a:rPr>
-              <a:t>03   WHY 2D FIRST</a:t>
-            </a:r>
-          </a:p>
-        </p:txBody>
-      </p:sp>
-      <p:sp>
-        <p:nvSpPr>
-          <p:cNvPr id="21" name="TextBox 20"/>
+              <a:t>CURRENT PROGRESS  —  2D PHASE COMPLETED</a:t>
+            </a:r>
+          </a:p>
+        </p:txBody>
+      </p:sp>
+      <p:sp>
+        <p:nvSpPr>
+          <p:cNvPr id="19" name="TextBox 18"/>
           <p:cNvSpPr txBox="1"/>
           <p:nvPr/>
         </p:nvSpPr>
         <p:spPr>
           <a:xfrm>
-            <a:off x="8421624" y="2560320"/>
-            <a:ext cx="3337560" cy="777240"/>
+            <a:off x="603504" y="5120640"/>
+            <a:ext cx="7260336" cy="1261872"/>
           </a:xfrm>
           <a:prstGeom prst="rect">
             <a:avLst/>
@@ -3957,124 +3836,110 @@
           </a:bodyPr>
           <a:lstStyle/>
           <a:p>
-            <a:r>
-              <a:rPr sz="1500" b="1">
+            <a:pPr>
+              <a:spcAft>
+                <a:spcPts val="300"/>
+              </a:spcAft>
+            </a:pPr>
+            <a:r>
+              <a:rPr sz="1300" b="0">
                 <a:solidFill>
                   <a:srgbClr val="1A2332"/>
                 </a:solidFill>
                 <a:latin typeface="Calibri"/>
               </a:rPr>
-              <a:t>3D is the same pixel plus RealSense depth.</a:t>
-            </a:r>
-          </a:p>
-        </p:txBody>
-      </p:sp>
-      <p:sp>
-        <p:nvSpPr>
-          <p:cNvPr id="22" name="TextBox 21"/>
-          <p:cNvSpPr txBox="1"/>
-          <p:nvPr/>
-        </p:nvSpPr>
-        <p:spPr>
-          <a:xfrm>
-            <a:off x="8421624" y="3383280"/>
-            <a:ext cx="3337560" cy="2468880"/>
-          </a:xfrm>
-          <a:prstGeom prst="rect">
-            <a:avLst/>
-          </a:prstGeom>
-          <a:noFill/>
-        </p:spPr>
-        <p:txBody>
-          <a:bodyPr wrap="square">
-            <a:spAutoFit/>
-          </a:bodyPr>
-          <a:lstStyle/>
+              <a:t>▸   33 body landmarks detected using MediaPipe Pose</a:t>
+            </a:r>
+          </a:p>
           <a:p>
             <a:pPr>
               <a:spcAft>
-                <a:spcPts val="1000"/>
+                <a:spcPts val="300"/>
               </a:spcAft>
             </a:pPr>
             <a:r>
-              <a:rPr sz="1400" b="0">
-                <a:solidFill>
-                  <a:srgbClr val="5A6678"/>
+              <a:rPr sz="1300" b="0">
+                <a:solidFill>
+                  <a:srgbClr val="1A2332"/>
                 </a:solidFill>
                 <a:latin typeface="Calibri"/>
               </a:rPr>
-              <a:t>▸  If the 2D dot is wrong, 3D will be wrong</a:t>
+              <a:t>▸   Joint coordinates represented in RGB image pixels (u, v)</a:t>
             </a:r>
           </a:p>
           <a:p>
             <a:pPr>
               <a:spcAft>
-                <a:spcPts val="1000"/>
+                <a:spcPts val="300"/>
               </a:spcAft>
             </a:pPr>
             <a:r>
-              <a:rPr sz="1400" b="0">
-                <a:solidFill>
-                  <a:srgbClr val="5A6678"/>
+              <a:rPr sz="1300" b="0">
+                <a:solidFill>
+                  <a:srgbClr val="1A2332"/>
                 </a:solidFill>
                 <a:latin typeface="Calibri"/>
               </a:rPr>
-              <a:t>▸  So: RGB → keypoints → angles → one app</a:t>
+              <a:t>▸   Elbow angles calculated in the image plane</a:t>
             </a:r>
           </a:p>
           <a:p>
             <a:pPr>
               <a:spcAft>
-                <a:spcPts val="1000"/>
+                <a:spcPts val="300"/>
               </a:spcAft>
             </a:pPr>
             <a:r>
-              <a:rPr sz="1400" b="0">
-                <a:solidFill>
-                  <a:srgbClr val="5A6678"/>
+              <a:rPr sz="1300" b="0">
+                <a:solidFill>
+                  <a:srgbClr val="1A2332"/>
                 </a:solidFill>
                 <a:latin typeface="Calibri"/>
               </a:rPr>
-              <a:t>▸  Then add aligned depth for metres / m/s</a:t>
+              <a:t>▸   Wrist trajectory and pixel velocity calculated</a:t>
             </a:r>
           </a:p>
           <a:p>
             <a:pPr>
               <a:spcAft>
-                <a:spcPts val="1000"/>
+                <a:spcPts val="300"/>
               </a:spcAft>
             </a:pPr>
             <a:r>
-              <a:rPr sz="1400" b="0">
-                <a:solidFill>
-                  <a:srgbClr val="5A6678"/>
+              <a:rPr sz="1300" b="0">
+                <a:solidFill>
+                  <a:srgbClr val="1A2332"/>
                 </a:solidFill>
                 <a:latin typeface="Calibri"/>
               </a:rPr>
-              <a:t>▸  Do not treat MediaPipe “world” as RealSense 3D</a:t>
-            </a:r>
-          </a:p>
-        </p:txBody>
-      </p:sp>
-      <p:sp>
-        <p:nvSpPr>
-          <p:cNvPr id="23" name="Rectangle 22"/>
+              <a:t>▸   CSV / video output and post-session analysis report implemented</a:t>
+            </a:r>
+          </a:p>
+        </p:txBody>
+      </p:sp>
+      <p:sp>
+        <p:nvSpPr>
+          <p:cNvPr id="20" name="Rounded Rectangle 19"/>
           <p:cNvSpPr/>
           <p:nvPr/>
         </p:nvSpPr>
         <p:spPr>
           <a:xfrm>
-            <a:off x="0" y="6510528"/>
-            <a:ext cx="12191695" cy="347472"/>
-          </a:xfrm>
-          <a:prstGeom prst="rect">
-            <a:avLst/>
+            <a:off x="8211312" y="1609344"/>
+            <a:ext cx="3621024" cy="2487168"/>
+          </a:xfrm>
+          <a:prstGeom prst="roundRect">
+            <a:avLst>
+              <a:gd name="adj" fmla="val 8000"/>
+            </a:avLst>
           </a:prstGeom>
           <a:solidFill>
             <a:srgbClr val="0B1F3A"/>
           </a:solidFill>
-          <a:ln>
-            <a:noFill/>
+          <a:ln w="12700">
+            <a:solidFill>
+              <a:srgbClr val="E4E0D8"/>
+            </a:solidFill>
           </a:ln>
         </p:spPr>
         <p:style>
@@ -4099,16 +3964,40 @@
           </a:p>
         </p:txBody>
       </p:sp>
-      <p:sp>
-        <p:nvSpPr>
-          <p:cNvPr id="24" name="TextBox 23"/>
+      <p:pic>
+        <p:nvPicPr>
+          <p:cNvPr id="21" name="Picture 20" descr="d455f_card.png"/>
+          <p:cNvPicPr>
+            <a:picLocks noChangeAspect="1"/>
+          </p:cNvPicPr>
+          <p:nvPr/>
+        </p:nvPicPr>
+        <p:blipFill>
+          <a:blip r:embed="rId2"/>
+          <a:stretch>
+            <a:fillRect/>
+          </a:stretch>
+        </p:blipFill>
+        <p:spPr>
+          <a:xfrm>
+            <a:off x="8302752" y="1682496"/>
+            <a:ext cx="3438144" cy="1783080"/>
+          </a:xfrm>
+          <a:prstGeom prst="rect">
+            <a:avLst/>
+          </a:prstGeom>
+        </p:spPr>
+      </p:pic>
+      <p:sp>
+        <p:nvSpPr>
+          <p:cNvPr id="22" name="TextBox 21"/>
           <p:cNvSpPr txBox="1"/>
           <p:nvPr/>
         </p:nvSpPr>
         <p:spPr>
           <a:xfrm>
-            <a:off x="457200" y="6547104"/>
-            <a:ext cx="11247120" cy="274320"/>
+            <a:off x="8339328" y="3493008"/>
+            <a:ext cx="3364992" cy="237744"/>
           </a:xfrm>
           <a:prstGeom prst="rect">
             <a:avLst/>
@@ -4121,14 +4010,402 @@
           </a:bodyPr>
           <a:lstStyle/>
           <a:p>
-            <a:r>
-              <a:rPr sz="1100" b="0">
-                <a:solidFill>
-                  <a:srgbClr val="FFFFFF"/>
+            <a:pPr algn="ctr"/>
+            <a:r>
+              <a:rPr sz="1200" b="1">
+                <a:solidFill>
+                  <a:srgbClr val="1FB5A6"/>
                 </a:solidFill>
                 <a:latin typeface="Calibri"/>
               </a:rPr>
-              <a:t>Jay   ·   IIT Guwahati   ·   2D phase complete   ·   Next: depth → camera metres</a:t>
+              <a:t>INTEL REALSENSE  D455f</a:t>
+            </a:r>
+          </a:p>
+        </p:txBody>
+      </p:sp>
+      <p:sp>
+        <p:nvSpPr>
+          <p:cNvPr id="23" name="TextBox 22"/>
+          <p:cNvSpPr txBox="1"/>
+          <p:nvPr/>
+        </p:nvSpPr>
+        <p:spPr>
+          <a:xfrm>
+            <a:off x="8339328" y="3730752"/>
+            <a:ext cx="3364992" cy="256032"/>
+          </a:xfrm>
+          <a:prstGeom prst="rect">
+            <a:avLst/>
+          </a:prstGeom>
+          <a:noFill/>
+        </p:spPr>
+        <p:txBody>
+          <a:bodyPr wrap="none">
+            <a:spAutoFit/>
+          </a:bodyPr>
+          <a:lstStyle/>
+          <a:p>
+            <a:pPr algn="ctr"/>
+            <a:r>
+              <a:rPr sz="1100" b="0">
+                <a:solidFill>
+                  <a:srgbClr val="C5D4E8"/>
+                </a:solidFill>
+                <a:latin typeface="Calibri"/>
+              </a:rPr>
+              <a:t>Single RGB-D camera  ·  USB 3</a:t>
+            </a:r>
+          </a:p>
+        </p:txBody>
+      </p:sp>
+      <p:sp>
+        <p:nvSpPr>
+          <p:cNvPr id="24" name="Rounded Rectangle 23"/>
+          <p:cNvSpPr/>
+          <p:nvPr/>
+        </p:nvSpPr>
+        <p:spPr>
+          <a:xfrm>
+            <a:off x="8211312" y="4224528"/>
+            <a:ext cx="3621024" cy="841248"/>
+          </a:xfrm>
+          <a:prstGeom prst="roundRect">
+            <a:avLst>
+              <a:gd name="adj" fmla="val 12000"/>
+            </a:avLst>
+          </a:prstGeom>
+          <a:solidFill>
+            <a:srgbClr val="1FB5A6"/>
+          </a:solidFill>
+          <a:ln>
+            <a:noFill/>
+          </a:ln>
+        </p:spPr>
+        <p:style>
+          <a:lnRef idx="1">
+            <a:schemeClr val="accent1"/>
+          </a:lnRef>
+          <a:fillRef idx="3">
+            <a:schemeClr val="accent1"/>
+          </a:fillRef>
+          <a:effectRef idx="2">
+            <a:schemeClr val="accent1"/>
+          </a:effectRef>
+          <a:fontRef idx="minor">
+            <a:schemeClr val="lt1"/>
+          </a:fontRef>
+        </p:style>
+        <p:txBody>
+          <a:bodyPr rtlCol="0" anchor="ctr"/>
+          <a:lstStyle/>
+          <a:p>
+            <a:pPr algn="ctr"/>
+          </a:p>
+        </p:txBody>
+      </p:sp>
+      <p:sp>
+        <p:nvSpPr>
+          <p:cNvPr id="25" name="TextBox 24"/>
+          <p:cNvSpPr txBox="1"/>
+          <p:nvPr/>
+        </p:nvSpPr>
+        <p:spPr>
+          <a:xfrm>
+            <a:off x="8357616" y="4315968"/>
+            <a:ext cx="3328416" cy="256032"/>
+          </a:xfrm>
+          <a:prstGeom prst="rect">
+            <a:avLst/>
+          </a:prstGeom>
+          <a:noFill/>
+        </p:spPr>
+        <p:txBody>
+          <a:bodyPr wrap="none">
+            <a:spAutoFit/>
+          </a:bodyPr>
+          <a:lstStyle/>
+          <a:p>
+            <a:pPr algn="ctr"/>
+            <a:r>
+              <a:rPr sz="1300" b="1">
+                <a:solidFill>
+                  <a:srgbClr val="FFFFFF"/>
+                </a:solidFill>
+                <a:latin typeface="Calibri"/>
+              </a:rPr>
+              <a:t>2D   ·   COMPLETED</a:t>
+            </a:r>
+          </a:p>
+        </p:txBody>
+      </p:sp>
+      <p:sp>
+        <p:nvSpPr>
+          <p:cNvPr id="26" name="TextBox 25"/>
+          <p:cNvSpPr txBox="1"/>
+          <p:nvPr/>
+        </p:nvSpPr>
+        <p:spPr>
+          <a:xfrm>
+            <a:off x="8357616" y="4590288"/>
+            <a:ext cx="3328416" cy="384048"/>
+          </a:xfrm>
+          <a:prstGeom prst="rect">
+            <a:avLst/>
+          </a:prstGeom>
+          <a:noFill/>
+        </p:spPr>
+        <p:txBody>
+          <a:bodyPr wrap="square">
+            <a:spAutoFit/>
+          </a:bodyPr>
+          <a:lstStyle/>
+          <a:p>
+            <a:pPr algn="ctr"/>
+            <a:r>
+              <a:rPr sz="1100" b="0">
+                <a:solidFill>
+                  <a:srgbClr val="E8FFFB"/>
+                </a:solidFill>
+                <a:latin typeface="Calibri"/>
+              </a:rPr>
+              <a:t>RGB joints, elbow °, wrist path</a:t>
+            </a:r>
+          </a:p>
+        </p:txBody>
+      </p:sp>
+      <p:sp>
+        <p:nvSpPr>
+          <p:cNvPr id="27" name="Down Arrow 26"/>
+          <p:cNvSpPr/>
+          <p:nvPr/>
+        </p:nvSpPr>
+        <p:spPr>
+          <a:xfrm>
+            <a:off x="9784080" y="5120640"/>
+            <a:ext cx="475488" cy="256032"/>
+          </a:xfrm>
+          <a:prstGeom prst="downArrow">
+            <a:avLst/>
+          </a:prstGeom>
+          <a:solidFill>
+            <a:srgbClr val="E8A338"/>
+          </a:solidFill>
+          <a:ln>
+            <a:noFill/>
+          </a:ln>
+        </p:spPr>
+        <p:style>
+          <a:lnRef idx="1">
+            <a:schemeClr val="accent1"/>
+          </a:lnRef>
+          <a:fillRef idx="3">
+            <a:schemeClr val="accent1"/>
+          </a:fillRef>
+          <a:effectRef idx="2">
+            <a:schemeClr val="accent1"/>
+          </a:effectRef>
+          <a:fontRef idx="minor">
+            <a:schemeClr val="lt1"/>
+          </a:fontRef>
+        </p:style>
+        <p:txBody>
+          <a:bodyPr rtlCol="0" anchor="ctr"/>
+          <a:lstStyle/>
+          <a:p>
+            <a:pPr algn="ctr"/>
+          </a:p>
+        </p:txBody>
+      </p:sp>
+      <p:sp>
+        <p:nvSpPr>
+          <p:cNvPr id="28" name="Rounded Rectangle 27"/>
+          <p:cNvSpPr/>
+          <p:nvPr/>
+        </p:nvSpPr>
+        <p:spPr>
+          <a:xfrm>
+            <a:off x="8211312" y="5431536"/>
+            <a:ext cx="3621024" cy="841248"/>
+          </a:xfrm>
+          <a:prstGeom prst="roundRect">
+            <a:avLst>
+              <a:gd name="adj" fmla="val 12000"/>
+            </a:avLst>
+          </a:prstGeom>
+          <a:solidFill>
+            <a:srgbClr val="FFFFFF"/>
+          </a:solidFill>
+          <a:ln w="25400">
+            <a:solidFill>
+              <a:srgbClr val="E8A338"/>
+            </a:solidFill>
+          </a:ln>
+        </p:spPr>
+        <p:style>
+          <a:lnRef idx="1">
+            <a:schemeClr val="accent1"/>
+          </a:lnRef>
+          <a:fillRef idx="3">
+            <a:schemeClr val="accent1"/>
+          </a:fillRef>
+          <a:effectRef idx="2">
+            <a:schemeClr val="accent1"/>
+          </a:effectRef>
+          <a:fontRef idx="minor">
+            <a:schemeClr val="lt1"/>
+          </a:fontRef>
+        </p:style>
+        <p:txBody>
+          <a:bodyPr rtlCol="0" anchor="ctr"/>
+          <a:lstStyle/>
+          <a:p>
+            <a:pPr algn="ctr"/>
+          </a:p>
+        </p:txBody>
+      </p:sp>
+      <p:sp>
+        <p:nvSpPr>
+          <p:cNvPr id="29" name="TextBox 28"/>
+          <p:cNvSpPr txBox="1"/>
+          <p:nvPr/>
+        </p:nvSpPr>
+        <p:spPr>
+          <a:xfrm>
+            <a:off x="8357616" y="5522976"/>
+            <a:ext cx="3328416" cy="256032"/>
+          </a:xfrm>
+          <a:prstGeom prst="rect">
+            <a:avLst/>
+          </a:prstGeom>
+          <a:noFill/>
+        </p:spPr>
+        <p:txBody>
+          <a:bodyPr wrap="none">
+            <a:spAutoFit/>
+          </a:bodyPr>
+          <a:lstStyle/>
+          <a:p>
+            <a:pPr algn="ctr"/>
+            <a:r>
+              <a:rPr sz="1300" b="1">
+                <a:solidFill>
+                  <a:srgbClr val="E8A338"/>
+                </a:solidFill>
+                <a:latin typeface="Calibri"/>
+              </a:rPr>
+              <a:t>3D   ·   NEXT PHASE</a:t>
+            </a:r>
+          </a:p>
+        </p:txBody>
+      </p:sp>
+      <p:sp>
+        <p:nvSpPr>
+          <p:cNvPr id="30" name="TextBox 29"/>
+          <p:cNvSpPr txBox="1"/>
+          <p:nvPr/>
+        </p:nvSpPr>
+        <p:spPr>
+          <a:xfrm>
+            <a:off x="8357616" y="5797296"/>
+            <a:ext cx="3328416" cy="384048"/>
+          </a:xfrm>
+          <a:prstGeom prst="rect">
+            <a:avLst/>
+          </a:prstGeom>
+          <a:noFill/>
+        </p:spPr>
+        <p:txBody>
+          <a:bodyPr wrap="square">
+            <a:spAutoFit/>
+          </a:bodyPr>
+          <a:lstStyle/>
+          <a:p>
+            <a:pPr algn="ctr"/>
+            <a:r>
+              <a:rPr sz="1100" b="0">
+                <a:solidFill>
+                  <a:srgbClr val="5A6678"/>
+                </a:solidFill>
+                <a:latin typeface="Calibri"/>
+              </a:rPr>
+              <a:t>Depth → camera metres / m/s</a:t>
+            </a:r>
+          </a:p>
+        </p:txBody>
+      </p:sp>
+      <p:sp>
+        <p:nvSpPr>
+          <p:cNvPr id="31" name="Rectangle 30"/>
+          <p:cNvSpPr/>
+          <p:nvPr/>
+        </p:nvSpPr>
+        <p:spPr>
+          <a:xfrm>
+            <a:off x="0" y="6510528"/>
+            <a:ext cx="12191695" cy="347472"/>
+          </a:xfrm>
+          <a:prstGeom prst="rect">
+            <a:avLst/>
+          </a:prstGeom>
+          <a:solidFill>
+            <a:srgbClr val="0B1F3A"/>
+          </a:solidFill>
+          <a:ln>
+            <a:noFill/>
+          </a:ln>
+        </p:spPr>
+        <p:style>
+          <a:lnRef idx="1">
+            <a:schemeClr val="accent1"/>
+          </a:lnRef>
+          <a:fillRef idx="3">
+            <a:schemeClr val="accent1"/>
+          </a:fillRef>
+          <a:effectRef idx="2">
+            <a:schemeClr val="accent1"/>
+          </a:effectRef>
+          <a:fontRef idx="minor">
+            <a:schemeClr val="lt1"/>
+          </a:fontRef>
+        </p:style>
+        <p:txBody>
+          <a:bodyPr rtlCol="0" anchor="ctr"/>
+          <a:lstStyle/>
+          <a:p>
+            <a:pPr algn="ctr"/>
+          </a:p>
+        </p:txBody>
+      </p:sp>
+      <p:sp>
+        <p:nvSpPr>
+          <p:cNvPr id="32" name="TextBox 31"/>
+          <p:cNvSpPr txBox="1"/>
+          <p:nvPr/>
+        </p:nvSpPr>
+        <p:spPr>
+          <a:xfrm>
+            <a:off x="457200" y="6547104"/>
+            <a:ext cx="11247120" cy="274320"/>
+          </a:xfrm>
+          <a:prstGeom prst="rect">
+            <a:avLst/>
+          </a:prstGeom>
+          <a:noFill/>
+        </p:spPr>
+        <p:txBody>
+          <a:bodyPr wrap="none">
+            <a:spAutoFit/>
+          </a:bodyPr>
+          <a:lstStyle/>
+          <a:p>
+            <a:r>
+              <a:rPr sz="1100" b="0">
+                <a:solidFill>
+                  <a:srgbClr val="FFFFFF"/>
+                </a:solidFill>
+                <a:latin typeface="Calibri"/>
+              </a:rPr>
+              <a:t>Current status    ·    2D analysis completed     →     3D depth-based analysis is the next phase</a:t>
             </a:r>
           </a:p>
         </p:txBody>
@@ -4203,7 +4480,7 @@
         <p:spPr>
           <a:xfrm>
             <a:off x="0" y="0"/>
-            <a:ext cx="12191695" cy="1572768"/>
+            <a:ext cx="12191695" cy="1353312"/>
           </a:xfrm>
           <a:prstGeom prst="rect">
             <a:avLst/>
@@ -4245,8 +4522,8 @@
         </p:nvSpPr>
         <p:spPr>
           <a:xfrm>
-            <a:off x="0" y="1572768"/>
-            <a:ext cx="12191695" cy="73152"/>
+            <a:off x="0" y="1353312"/>
+            <a:ext cx="12191695" cy="64008"/>
           </a:xfrm>
           <a:prstGeom prst="rect">
             <a:avLst/>
@@ -4288,8 +4565,8 @@
         </p:nvSpPr>
         <p:spPr>
           <a:xfrm>
-            <a:off x="457200" y="164592"/>
-            <a:ext cx="11247120" cy="292608"/>
+            <a:off x="457200" y="109728"/>
+            <a:ext cx="11247120" cy="256032"/>
           </a:xfrm>
           <a:prstGeom prst="rect">
             <a:avLst/>
@@ -4309,7 +4586,7 @@
                 </a:solidFill>
                 <a:latin typeface="Calibri"/>
               </a:rPr>
-              <a:t>SOLUTION   ·   2D APPLICATION</a:t>
+              <a:t>SLIDE 2   ·   SOLUTION  &amp;  SYSTEM WORKFLOW</a:t>
             </a:r>
           </a:p>
         </p:txBody>
@@ -4322,8 +4599,8 @@
         </p:nvSpPr>
         <p:spPr>
           <a:xfrm>
-            <a:off x="457200" y="438912"/>
-            <a:ext cx="11247120" cy="640080"/>
+            <a:off x="457200" y="347472"/>
+            <a:ext cx="11247120" cy="566928"/>
           </a:xfrm>
           <a:prstGeom prst="rect">
             <a:avLst/>
@@ -4337,13 +4614,13 @@
           <a:lstStyle/>
           <a:p>
             <a:r>
-              <a:rPr sz="3200" b="1">
+              <a:rPr sz="2400" b="1">
                 <a:solidFill>
                   <a:srgbClr val="FFFFFF"/>
                 </a:solidFill>
                 <a:latin typeface="Calibri"/>
               </a:rPr>
-              <a:t>What we built</a:t>
+              <a:t>Proposed Solution — End-to-End Motion Analysis Pipeline</a:t>
             </a:r>
           </a:p>
         </p:txBody>
@@ -4356,8 +4633,8 @@
         </p:nvSpPr>
         <p:spPr>
           <a:xfrm>
-            <a:off x="457200" y="1060704"/>
-            <a:ext cx="11247120" cy="365760"/>
+            <a:off x="457200" y="932688"/>
+            <a:ext cx="11247120" cy="329184"/>
           </a:xfrm>
           <a:prstGeom prst="rect">
             <a:avLst/>
@@ -4371,13 +4648,13 @@
           <a:lstStyle/>
           <a:p>
             <a:r>
-              <a:rPr sz="1500" b="0">
+              <a:rPr sz="1400" b="0">
                 <a:solidFill>
                   <a:srgbClr val="C5D4E8"/>
                 </a:solidFill>
                 <a:latin typeface="Calibri"/>
               </a:rPr>
-              <a:t>One window: live D455f or upload  ·  skeleton, elbow degrees, wrist path  ·  optional save</a:t>
+              <a:t>2D path is built     ·     dashed 3D path is the next phase, not implemented</a:t>
             </a:r>
           </a:p>
         </p:txBody>
@@ -4390,8 +4667,8 @@
         </p:nvSpPr>
         <p:spPr>
           <a:xfrm>
-            <a:off x="411480" y="1828800"/>
-            <a:ext cx="11365992" cy="713232"/>
+            <a:off x="347472" y="1554480"/>
+            <a:ext cx="11484864" cy="530352"/>
           </a:xfrm>
           <a:prstGeom prst="roundRect">
             <a:avLst>
@@ -4437,8 +4714,8 @@
         </p:nvSpPr>
         <p:spPr>
           <a:xfrm>
-            <a:off x="411480" y="1828800"/>
-            <a:ext cx="109728" cy="713232"/>
+            <a:off x="347472" y="1554480"/>
+            <a:ext cx="91440" cy="530352"/>
           </a:xfrm>
           <a:prstGeom prst="rect">
             <a:avLst/>
@@ -4480,8 +4757,8 @@
         </p:nvSpPr>
         <p:spPr>
           <a:xfrm>
-            <a:off x="713232" y="1920240"/>
-            <a:ext cx="10881360" cy="530352"/>
+            <a:off x="585216" y="1627632"/>
+            <a:ext cx="11119104" cy="384048"/>
           </a:xfrm>
           <a:prstGeom prst="rect">
             <a:avLst/>
@@ -4495,27 +4772,61 @@
           <a:lstStyle/>
           <a:p>
             <a:r>
-              <a:rPr sz="1600" b="0">
+              <a:rPr sz="1300" b="0">
                 <a:solidFill>
                   <a:srgbClr val="1A2332"/>
                 </a:solidFill>
                 <a:latin typeface="Calibri"/>
               </a:rPr>
-              <a:t>A user-facing 2D app. Thresholds stay in config.yaml. Camera pixels only — not metres, not a medical device.</a:t>
-            </a:r>
-          </a:p>
-        </p:txBody>
-      </p:sp>
-      <p:sp>
-        <p:nvSpPr>
-          <p:cNvPr id="11" name="Rounded Rectangle 10"/>
+              <a:t>A single RGB-D camera captures the subject, MediaPipe extracts 33 body landmarks, and the system converts these landmarks into measurable motion parameters.</a:t>
+            </a:r>
+          </a:p>
+        </p:txBody>
+      </p:sp>
+      <p:sp>
+        <p:nvSpPr>
+          <p:cNvPr id="11" name="TextBox 10"/>
+          <p:cNvSpPr txBox="1"/>
+          <p:nvPr/>
+        </p:nvSpPr>
+        <p:spPr>
+          <a:xfrm>
+            <a:off x="347472" y="2157984"/>
+            <a:ext cx="5486400" cy="219456"/>
+          </a:xfrm>
+          <a:prstGeom prst="rect">
+            <a:avLst/>
+          </a:prstGeom>
+          <a:noFill/>
+        </p:spPr>
+        <p:txBody>
+          <a:bodyPr wrap="none">
+            <a:spAutoFit/>
+          </a:bodyPr>
+          <a:lstStyle/>
+          <a:p>
+            <a:r>
+              <a:rPr sz="1100" b="1">
+                <a:solidFill>
+                  <a:srgbClr val="1FB5A6"/>
+                </a:solidFill>
+                <a:latin typeface="Calibri"/>
+              </a:rPr>
+              <a:t>BUILT   ·   2D MOTION ANALYSIS</a:t>
+            </a:r>
+          </a:p>
+        </p:txBody>
+      </p:sp>
+      <p:sp>
+        <p:nvSpPr>
+          <p:cNvPr id="12" name="Rounded Rectangle 11"/>
           <p:cNvSpPr/>
           <p:nvPr/>
         </p:nvSpPr>
         <p:spPr>
           <a:xfrm>
-            <a:off x="411480" y="2724912"/>
-            <a:ext cx="2395728" cy="2331720"/>
+            <a:off x="347472" y="2414016"/>
+            <a:ext cx="1960473" cy="2084831"/>
           </a:xfrm>
           <a:prstGeom prst="roundRect">
             <a:avLst>
@@ -4555,14 +4866,14 @@
       </p:sp>
       <p:sp>
         <p:nvSpPr>
-          <p:cNvPr id="12" name="Rectangle 11"/>
+          <p:cNvPr id="13" name="Rectangle 12"/>
           <p:cNvSpPr/>
           <p:nvPr/>
         </p:nvSpPr>
         <p:spPr>
           <a:xfrm>
-            <a:off x="411480" y="2724912"/>
-            <a:ext cx="2395728" cy="91440"/>
+            <a:off x="347472" y="2414016"/>
+            <a:ext cx="1960473" cy="73152"/>
           </a:xfrm>
           <a:prstGeom prst="rect">
             <a:avLst/>
@@ -4598,14 +4909,14 @@
       </p:sp>
       <p:sp>
         <p:nvSpPr>
-          <p:cNvPr id="13" name="TextBox 12"/>
+          <p:cNvPr id="14" name="TextBox 13"/>
           <p:cNvSpPr txBox="1"/>
           <p:nvPr/>
         </p:nvSpPr>
         <p:spPr>
           <a:xfrm>
-            <a:off x="539496" y="2926080"/>
-            <a:ext cx="2139696" cy="384048"/>
+            <a:off x="438912" y="2560320"/>
+            <a:ext cx="1777593" cy="237744"/>
           </a:xfrm>
           <a:prstGeom prst="rect">
             <a:avLst/>
@@ -4619,125 +4930,40 @@
           <a:lstStyle/>
           <a:p>
             <a:r>
-              <a:rPr sz="1300" b="1">
+              <a:rPr sz="1100" b="1">
                 <a:solidFill>
                   <a:srgbClr val="1FB5A6"/>
                 </a:solidFill>
                 <a:latin typeface="Calibri"/>
               </a:rPr>
-              <a:t>01  RGB SOURCE</a:t>
-            </a:r>
-          </a:p>
-        </p:txBody>
-      </p:sp>
-      <p:sp>
-        <p:nvSpPr>
-          <p:cNvPr id="14" name="TextBox 13"/>
-          <p:cNvSpPr txBox="1"/>
-          <p:nvPr/>
-        </p:nvSpPr>
-        <p:spPr>
-          <a:xfrm>
-            <a:off x="539496" y="3364992"/>
-            <a:ext cx="2139696" cy="1051560"/>
-          </a:xfrm>
-          <a:prstGeom prst="rect">
-            <a:avLst/>
-          </a:prstGeom>
-          <a:noFill/>
-        </p:spPr>
-        <p:txBody>
-          <a:bodyPr wrap="square">
-            <a:spAutoFit/>
-          </a:bodyPr>
-          <a:lstStyle/>
-          <a:p>
-            <a:pPr>
-              <a:spcAft>
-                <a:spcPts val="200"/>
-              </a:spcAft>
-            </a:pPr>
-            <a:r>
-              <a:rPr sz="1500" b="1">
-                <a:solidFill>
-                  <a:srgbClr val="1A2332"/>
-                </a:solidFill>
-                <a:latin typeface="Calibri"/>
-              </a:rPr>
-              <a:t>Live D455f</a:t>
-            </a:r>
-          </a:p>
-          <a:p>
-            <a:pPr>
-              <a:spcAft>
-                <a:spcPts val="200"/>
-              </a:spcAft>
-            </a:pPr>
-            <a:r>
-              <a:rPr sz="1500" b="1">
-                <a:solidFill>
-                  <a:srgbClr val="1A2332"/>
-                </a:solidFill>
-                <a:latin typeface="Calibri"/>
-              </a:rPr>
-              <a:t>or .mp4 / .avi / .bag</a:t>
-            </a:r>
-          </a:p>
-        </p:txBody>
-      </p:sp>
-      <p:sp>
-        <p:nvSpPr>
-          <p:cNvPr id="15" name="TextBox 14"/>
-          <p:cNvSpPr txBox="1"/>
-          <p:nvPr/>
-        </p:nvSpPr>
-        <p:spPr>
-          <a:xfrm>
-            <a:off x="539496" y="4507992"/>
-            <a:ext cx="2139696" cy="384048"/>
-          </a:xfrm>
-          <a:prstGeom prst="rect">
-            <a:avLst/>
-          </a:prstGeom>
-          <a:noFill/>
-        </p:spPr>
-        <p:txBody>
-          <a:bodyPr wrap="square">
-            <a:spAutoFit/>
-          </a:bodyPr>
-          <a:lstStyle/>
-          <a:p>
-            <a:r>
-              <a:rPr sz="1200" b="0">
-                <a:solidFill>
-                  <a:srgbClr val="5A6678"/>
-                </a:solidFill>
-                <a:latin typeface="Calibri"/>
-              </a:rPr>
-              <a:t>Colour frames only</a:t>
-            </a:r>
-          </a:p>
-        </p:txBody>
-      </p:sp>
-      <p:sp>
-        <p:nvSpPr>
-          <p:cNvPr id="16" name="Right Arrow 15"/>
+              <a:t>01  INPUT</a:t>
+            </a:r>
+          </a:p>
+        </p:txBody>
+      </p:sp>
+      <p:sp>
+        <p:nvSpPr>
+          <p:cNvPr id="15" name="Rounded Rectangle 14"/>
           <p:cNvSpPr/>
           <p:nvPr/>
         </p:nvSpPr>
         <p:spPr>
           <a:xfrm>
-            <a:off x="2898648" y="3685032"/>
-            <a:ext cx="329184" cy="292608"/>
-          </a:xfrm>
-          <a:prstGeom prst="rightArrow">
-            <a:avLst/>
-          </a:prstGeom>
-          <a:solidFill>
-            <a:srgbClr val="1FB5A6"/>
-          </a:solidFill>
-          <a:ln>
-            <a:noFill/>
+            <a:off x="438912" y="2852928"/>
+            <a:ext cx="1777593" cy="420624"/>
+          </a:xfrm>
+          <a:prstGeom prst="roundRect">
+            <a:avLst>
+              <a:gd name="adj" fmla="val 18000"/>
+            </a:avLst>
+          </a:prstGeom>
+          <a:solidFill>
+            <a:srgbClr val="F6F3EE"/>
+          </a:solidFill>
+          <a:ln w="9525">
+            <a:solidFill>
+              <a:srgbClr val="E4E0D8"/>
+            </a:solidFill>
           </a:ln>
         </p:spPr>
         <p:style>
@@ -4764,14 +4990,208 @@
       </p:sp>
       <p:sp>
         <p:nvSpPr>
+          <p:cNvPr id="16" name="TextBox 15"/>
+          <p:cNvSpPr txBox="1"/>
+          <p:nvPr/>
+        </p:nvSpPr>
+        <p:spPr>
+          <a:xfrm>
+            <a:off x="493776" y="2926080"/>
+            <a:ext cx="1667865" cy="292608"/>
+          </a:xfrm>
+          <a:prstGeom prst="rect">
+            <a:avLst/>
+          </a:prstGeom>
+          <a:noFill/>
+        </p:spPr>
+        <p:txBody>
+          <a:bodyPr wrap="square">
+            <a:spAutoFit/>
+          </a:bodyPr>
+          <a:lstStyle/>
+          <a:p>
+            <a:pPr algn="ctr"/>
+            <a:r>
+              <a:rPr sz="1200" b="1">
+                <a:solidFill>
+                  <a:srgbClr val="1A2332"/>
+                </a:solidFill>
+                <a:latin typeface="Calibri"/>
+              </a:rPr>
+              <a:t>Live D455f</a:t>
+            </a:r>
+          </a:p>
+        </p:txBody>
+      </p:sp>
+      <p:sp>
+        <p:nvSpPr>
           <p:cNvPr id="17" name="Rounded Rectangle 16"/>
           <p:cNvSpPr/>
           <p:nvPr/>
         </p:nvSpPr>
         <p:spPr>
           <a:xfrm>
-            <a:off x="3319272" y="2724912"/>
-            <a:ext cx="2395728" cy="2331720"/>
+            <a:off x="438912" y="3346704"/>
+            <a:ext cx="1777593" cy="420624"/>
+          </a:xfrm>
+          <a:prstGeom prst="roundRect">
+            <a:avLst>
+              <a:gd name="adj" fmla="val 18000"/>
+            </a:avLst>
+          </a:prstGeom>
+          <a:solidFill>
+            <a:srgbClr val="F6F3EE"/>
+          </a:solidFill>
+          <a:ln w="9525">
+            <a:solidFill>
+              <a:srgbClr val="E4E0D8"/>
+            </a:solidFill>
+          </a:ln>
+        </p:spPr>
+        <p:style>
+          <a:lnRef idx="1">
+            <a:schemeClr val="accent1"/>
+          </a:lnRef>
+          <a:fillRef idx="3">
+            <a:schemeClr val="accent1"/>
+          </a:fillRef>
+          <a:effectRef idx="2">
+            <a:schemeClr val="accent1"/>
+          </a:effectRef>
+          <a:fontRef idx="minor">
+            <a:schemeClr val="lt1"/>
+          </a:fontRef>
+        </p:style>
+        <p:txBody>
+          <a:bodyPr rtlCol="0" anchor="ctr"/>
+          <a:lstStyle/>
+          <a:p>
+            <a:pPr algn="ctr"/>
+          </a:p>
+        </p:txBody>
+      </p:sp>
+      <p:sp>
+        <p:nvSpPr>
+          <p:cNvPr id="18" name="TextBox 17"/>
+          <p:cNvSpPr txBox="1"/>
+          <p:nvPr/>
+        </p:nvSpPr>
+        <p:spPr>
+          <a:xfrm>
+            <a:off x="493776" y="3419856"/>
+            <a:ext cx="1667865" cy="292608"/>
+          </a:xfrm>
+          <a:prstGeom prst="rect">
+            <a:avLst/>
+          </a:prstGeom>
+          <a:noFill/>
+        </p:spPr>
+        <p:txBody>
+          <a:bodyPr wrap="square">
+            <a:spAutoFit/>
+          </a:bodyPr>
+          <a:lstStyle/>
+          <a:p>
+            <a:pPr algn="ctr"/>
+            <a:r>
+              <a:rPr sz="1200" b="1">
+                <a:solidFill>
+                  <a:srgbClr val="1A2332"/>
+                </a:solidFill>
+                <a:latin typeface="Calibri"/>
+              </a:rPr>
+              <a:t>Uploaded video</a:t>
+            </a:r>
+          </a:p>
+        </p:txBody>
+      </p:sp>
+      <p:sp>
+        <p:nvSpPr>
+          <p:cNvPr id="19" name="TextBox 18"/>
+          <p:cNvSpPr txBox="1"/>
+          <p:nvPr/>
+        </p:nvSpPr>
+        <p:spPr>
+          <a:xfrm>
+            <a:off x="438912" y="4151376"/>
+            <a:ext cx="1777593" cy="274320"/>
+          </a:xfrm>
+          <a:prstGeom prst="rect">
+            <a:avLst/>
+          </a:prstGeom>
+          <a:noFill/>
+        </p:spPr>
+        <p:txBody>
+          <a:bodyPr wrap="square">
+            <a:spAutoFit/>
+          </a:bodyPr>
+          <a:lstStyle/>
+          <a:p>
+            <a:r>
+              <a:rPr sz="1000" b="0">
+                <a:solidFill>
+                  <a:srgbClr val="5A6678"/>
+                </a:solidFill>
+                <a:latin typeface="Calibri"/>
+              </a:rPr>
+              <a:t>two sources, one pipeline</a:t>
+            </a:r>
+          </a:p>
+        </p:txBody>
+      </p:sp>
+      <p:sp>
+        <p:nvSpPr>
+          <p:cNvPr id="20" name="Right Arrow 19"/>
+          <p:cNvSpPr/>
+          <p:nvPr/>
+        </p:nvSpPr>
+        <p:spPr>
+          <a:xfrm>
+            <a:off x="2381097" y="3364992"/>
+            <a:ext cx="256032" cy="182880"/>
+          </a:xfrm>
+          <a:prstGeom prst="rightArrow">
+            <a:avLst/>
+          </a:prstGeom>
+          <a:solidFill>
+            <a:srgbClr val="1FB5A6"/>
+          </a:solidFill>
+          <a:ln>
+            <a:noFill/>
+          </a:ln>
+        </p:spPr>
+        <p:style>
+          <a:lnRef idx="1">
+            <a:schemeClr val="accent1"/>
+          </a:lnRef>
+          <a:fillRef idx="3">
+            <a:schemeClr val="accent1"/>
+          </a:fillRef>
+          <a:effectRef idx="2">
+            <a:schemeClr val="accent1"/>
+          </a:effectRef>
+          <a:fontRef idx="minor">
+            <a:schemeClr val="lt1"/>
+          </a:fontRef>
+        </p:style>
+        <p:txBody>
+          <a:bodyPr rtlCol="0" anchor="ctr"/>
+          <a:lstStyle/>
+          <a:p>
+            <a:pPr algn="ctr"/>
+          </a:p>
+        </p:txBody>
+      </p:sp>
+      <p:sp>
+        <p:nvSpPr>
+          <p:cNvPr id="21" name="Rounded Rectangle 20"/>
+          <p:cNvSpPr/>
+          <p:nvPr/>
+        </p:nvSpPr>
+        <p:spPr>
+          <a:xfrm>
+            <a:off x="2728569" y="2414016"/>
+            <a:ext cx="1960473" cy="2084831"/>
           </a:xfrm>
           <a:prstGeom prst="roundRect">
             <a:avLst>
@@ -4811,14 +5231,14 @@
       </p:sp>
       <p:sp>
         <p:nvSpPr>
-          <p:cNvPr id="18" name="Rectangle 17"/>
+          <p:cNvPr id="22" name="Rectangle 21"/>
           <p:cNvSpPr/>
           <p:nvPr/>
         </p:nvSpPr>
         <p:spPr>
           <a:xfrm>
-            <a:off x="3319272" y="2724912"/>
-            <a:ext cx="2395728" cy="91440"/>
+            <a:off x="2728569" y="2414016"/>
+            <a:ext cx="1960473" cy="73152"/>
           </a:xfrm>
           <a:prstGeom prst="rect">
             <a:avLst/>
@@ -4854,14 +5274,14 @@
       </p:sp>
       <p:sp>
         <p:nvSpPr>
-          <p:cNvPr id="19" name="TextBox 18"/>
+          <p:cNvPr id="23" name="TextBox 22"/>
           <p:cNvSpPr txBox="1"/>
           <p:nvPr/>
         </p:nvSpPr>
         <p:spPr>
           <a:xfrm>
-            <a:off x="3447288" y="2926080"/>
-            <a:ext cx="2139696" cy="384048"/>
+            <a:off x="2820009" y="2560320"/>
+            <a:ext cx="1777593" cy="237744"/>
           </a:xfrm>
           <a:prstGeom prst="rect">
             <a:avLst/>
@@ -4875,125 +5295,40 @@
           <a:lstStyle/>
           <a:p>
             <a:r>
-              <a:rPr sz="1300" b="1">
+              <a:rPr sz="1100" b="1">
                 <a:solidFill>
                   <a:srgbClr val="143258"/>
                 </a:solidFill>
                 <a:latin typeface="Calibri"/>
               </a:rPr>
-              <a:t>02  POSE  2D</a:t>
-            </a:r>
-          </a:p>
-        </p:txBody>
-      </p:sp>
-      <p:sp>
-        <p:nvSpPr>
-          <p:cNvPr id="20" name="TextBox 19"/>
-          <p:cNvSpPr txBox="1"/>
-          <p:nvPr/>
-        </p:nvSpPr>
-        <p:spPr>
-          <a:xfrm>
-            <a:off x="3447288" y="3364992"/>
-            <a:ext cx="2139696" cy="1051560"/>
-          </a:xfrm>
-          <a:prstGeom prst="rect">
-            <a:avLst/>
-          </a:prstGeom>
-          <a:noFill/>
-        </p:spPr>
-        <p:txBody>
-          <a:bodyPr wrap="square">
-            <a:spAutoFit/>
-          </a:bodyPr>
-          <a:lstStyle/>
-          <a:p>
-            <a:pPr>
-              <a:spcAft>
-                <a:spcPts val="200"/>
-              </a:spcAft>
-            </a:pPr>
-            <a:r>
-              <a:rPr sz="1500" b="1">
-                <a:solidFill>
-                  <a:srgbClr val="1A2332"/>
-                </a:solidFill>
-                <a:latin typeface="Calibri"/>
-              </a:rPr>
-              <a:t>MediaPipe Pose</a:t>
-            </a:r>
-          </a:p>
-          <a:p>
-            <a:pPr>
-              <a:spcAft>
-                <a:spcPts val="200"/>
-              </a:spcAft>
-            </a:pPr>
-            <a:r>
-              <a:rPr sz="1500" b="1">
-                <a:solidFill>
-                  <a:srgbClr val="1A2332"/>
-                </a:solidFill>
-                <a:latin typeface="Calibri"/>
-              </a:rPr>
-              <a:t>33 joints (u, v)</a:t>
-            </a:r>
-          </a:p>
-        </p:txBody>
-      </p:sp>
-      <p:sp>
-        <p:nvSpPr>
-          <p:cNvPr id="21" name="TextBox 20"/>
-          <p:cNvSpPr txBox="1"/>
-          <p:nvPr/>
-        </p:nvSpPr>
-        <p:spPr>
-          <a:xfrm>
-            <a:off x="3447288" y="4507992"/>
-            <a:ext cx="2139696" cy="384048"/>
-          </a:xfrm>
-          <a:prstGeom prst="rect">
-            <a:avLst/>
-          </a:prstGeom>
-          <a:noFill/>
-        </p:spPr>
-        <p:txBody>
-          <a:bodyPr wrap="square">
-            <a:spAutoFit/>
-          </a:bodyPr>
-          <a:lstStyle/>
-          <a:p>
-            <a:r>
-              <a:rPr sz="1200" b="0">
-                <a:solidFill>
-                  <a:srgbClr val="5A6678"/>
-                </a:solidFill>
-                <a:latin typeface="Calibri"/>
-              </a:rPr>
-              <a:t>Origin: top-left</a:t>
-            </a:r>
-          </a:p>
-        </p:txBody>
-      </p:sp>
-      <p:sp>
-        <p:nvSpPr>
-          <p:cNvPr id="22" name="Right Arrow 21"/>
+              <a:t>02  RGB FRAME</a:t>
+            </a:r>
+          </a:p>
+        </p:txBody>
+      </p:sp>
+      <p:sp>
+        <p:nvSpPr>
+          <p:cNvPr id="24" name="Rounded Rectangle 23"/>
           <p:cNvSpPr/>
           <p:nvPr/>
         </p:nvSpPr>
         <p:spPr>
           <a:xfrm>
-            <a:off x="5806440" y="3685032"/>
-            <a:ext cx="329184" cy="292608"/>
-          </a:xfrm>
-          <a:prstGeom prst="rightArrow">
-            <a:avLst/>
-          </a:prstGeom>
-          <a:solidFill>
-            <a:srgbClr val="1FB5A6"/>
-          </a:solidFill>
-          <a:ln>
-            <a:noFill/>
+            <a:off x="2820009" y="2852928"/>
+            <a:ext cx="1777593" cy="420624"/>
+          </a:xfrm>
+          <a:prstGeom prst="roundRect">
+            <a:avLst>
+              <a:gd name="adj" fmla="val 18000"/>
+            </a:avLst>
+          </a:prstGeom>
+          <a:solidFill>
+            <a:srgbClr val="F6F3EE"/>
+          </a:solidFill>
+          <a:ln w="9525">
+            <a:solidFill>
+              <a:srgbClr val="E4E0D8"/>
+            </a:solidFill>
           </a:ln>
         </p:spPr>
         <p:style>
@@ -5020,14 +5355,208 @@
       </p:sp>
       <p:sp>
         <p:nvSpPr>
-          <p:cNvPr id="23" name="Rounded Rectangle 22"/>
+          <p:cNvPr id="25" name="TextBox 24"/>
+          <p:cNvSpPr txBox="1"/>
+          <p:nvPr/>
+        </p:nvSpPr>
+        <p:spPr>
+          <a:xfrm>
+            <a:off x="2874873" y="2926080"/>
+            <a:ext cx="1667865" cy="292608"/>
+          </a:xfrm>
+          <a:prstGeom prst="rect">
+            <a:avLst/>
+          </a:prstGeom>
+          <a:noFill/>
+        </p:spPr>
+        <p:txBody>
+          <a:bodyPr wrap="square">
+            <a:spAutoFit/>
+          </a:bodyPr>
+          <a:lstStyle/>
+          <a:p>
+            <a:pPr algn="ctr"/>
+            <a:r>
+              <a:rPr sz="1200" b="1">
+                <a:solidFill>
+                  <a:srgbClr val="1A2332"/>
+                </a:solidFill>
+                <a:latin typeface="Calibri"/>
+              </a:rPr>
+              <a:t>Colour frame</a:t>
+            </a:r>
+          </a:p>
+        </p:txBody>
+      </p:sp>
+      <p:sp>
+        <p:nvSpPr>
+          <p:cNvPr id="26" name="Rounded Rectangle 25"/>
           <p:cNvSpPr/>
           <p:nvPr/>
         </p:nvSpPr>
         <p:spPr>
           <a:xfrm>
-            <a:off x="6227064" y="2724912"/>
-            <a:ext cx="2395728" cy="2331720"/>
+            <a:off x="2820009" y="3346704"/>
+            <a:ext cx="1777593" cy="420624"/>
+          </a:xfrm>
+          <a:prstGeom prst="roundRect">
+            <a:avLst>
+              <a:gd name="adj" fmla="val 18000"/>
+            </a:avLst>
+          </a:prstGeom>
+          <a:solidFill>
+            <a:srgbClr val="F6F3EE"/>
+          </a:solidFill>
+          <a:ln w="9525">
+            <a:solidFill>
+              <a:srgbClr val="E4E0D8"/>
+            </a:solidFill>
+          </a:ln>
+        </p:spPr>
+        <p:style>
+          <a:lnRef idx="1">
+            <a:schemeClr val="accent1"/>
+          </a:lnRef>
+          <a:fillRef idx="3">
+            <a:schemeClr val="accent1"/>
+          </a:fillRef>
+          <a:effectRef idx="2">
+            <a:schemeClr val="accent1"/>
+          </a:effectRef>
+          <a:fontRef idx="minor">
+            <a:schemeClr val="lt1"/>
+          </a:fontRef>
+        </p:style>
+        <p:txBody>
+          <a:bodyPr rtlCol="0" anchor="ctr"/>
+          <a:lstStyle/>
+          <a:p>
+            <a:pPr algn="ctr"/>
+          </a:p>
+        </p:txBody>
+      </p:sp>
+      <p:sp>
+        <p:nvSpPr>
+          <p:cNvPr id="27" name="TextBox 26"/>
+          <p:cNvSpPr txBox="1"/>
+          <p:nvPr/>
+        </p:nvSpPr>
+        <p:spPr>
+          <a:xfrm>
+            <a:off x="2874873" y="3419856"/>
+            <a:ext cx="1667865" cy="292608"/>
+          </a:xfrm>
+          <a:prstGeom prst="rect">
+            <a:avLst/>
+          </a:prstGeom>
+          <a:noFill/>
+        </p:spPr>
+        <p:txBody>
+          <a:bodyPr wrap="square">
+            <a:spAutoFit/>
+          </a:bodyPr>
+          <a:lstStyle/>
+          <a:p>
+            <a:pPr algn="ctr"/>
+            <a:r>
+              <a:rPr sz="1200" b="1">
+                <a:solidFill>
+                  <a:srgbClr val="1A2332"/>
+                </a:solidFill>
+                <a:latin typeface="Calibri"/>
+              </a:rPr>
+              <a:t>capture</a:t>
+            </a:r>
+          </a:p>
+        </p:txBody>
+      </p:sp>
+      <p:sp>
+        <p:nvSpPr>
+          <p:cNvPr id="28" name="TextBox 27"/>
+          <p:cNvSpPr txBox="1"/>
+          <p:nvPr/>
+        </p:nvSpPr>
+        <p:spPr>
+          <a:xfrm>
+            <a:off x="2820009" y="4151376"/>
+            <a:ext cx="1777593" cy="274320"/>
+          </a:xfrm>
+          <a:prstGeom prst="rect">
+            <a:avLst/>
+          </a:prstGeom>
+          <a:noFill/>
+        </p:spPr>
+        <p:txBody>
+          <a:bodyPr wrap="square">
+            <a:spAutoFit/>
+          </a:bodyPr>
+          <a:lstStyle/>
+          <a:p>
+            <a:r>
+              <a:rPr sz="1000" b="0">
+                <a:solidFill>
+                  <a:srgbClr val="5A6678"/>
+                </a:solidFill>
+                <a:latin typeface="Calibri"/>
+              </a:rPr>
+              <a:t>image plane only</a:t>
+            </a:r>
+          </a:p>
+        </p:txBody>
+      </p:sp>
+      <p:sp>
+        <p:nvSpPr>
+          <p:cNvPr id="29" name="Right Arrow 28"/>
+          <p:cNvSpPr/>
+          <p:nvPr/>
+        </p:nvSpPr>
+        <p:spPr>
+          <a:xfrm>
+            <a:off x="4762195" y="3364992"/>
+            <a:ext cx="256032" cy="182880"/>
+          </a:xfrm>
+          <a:prstGeom prst="rightArrow">
+            <a:avLst/>
+          </a:prstGeom>
+          <a:solidFill>
+            <a:srgbClr val="1FB5A6"/>
+          </a:solidFill>
+          <a:ln>
+            <a:noFill/>
+          </a:ln>
+        </p:spPr>
+        <p:style>
+          <a:lnRef idx="1">
+            <a:schemeClr val="accent1"/>
+          </a:lnRef>
+          <a:fillRef idx="3">
+            <a:schemeClr val="accent1"/>
+          </a:fillRef>
+          <a:effectRef idx="2">
+            <a:schemeClr val="accent1"/>
+          </a:effectRef>
+          <a:fontRef idx="minor">
+            <a:schemeClr val="lt1"/>
+          </a:fontRef>
+        </p:style>
+        <p:txBody>
+          <a:bodyPr rtlCol="0" anchor="ctr"/>
+          <a:lstStyle/>
+          <a:p>
+            <a:pPr algn="ctr"/>
+          </a:p>
+        </p:txBody>
+      </p:sp>
+      <p:sp>
+        <p:nvSpPr>
+          <p:cNvPr id="30" name="Rounded Rectangle 29"/>
+          <p:cNvSpPr/>
+          <p:nvPr/>
+        </p:nvSpPr>
+        <p:spPr>
+          <a:xfrm>
+            <a:off x="5109667" y="2414016"/>
+            <a:ext cx="1960473" cy="2084831"/>
           </a:xfrm>
           <a:prstGeom prst="roundRect">
             <a:avLst>
@@ -5067,20 +5596,20 @@
       </p:sp>
       <p:sp>
         <p:nvSpPr>
-          <p:cNvPr id="24" name="Rectangle 23"/>
+          <p:cNvPr id="31" name="Rectangle 30"/>
           <p:cNvSpPr/>
           <p:nvPr/>
         </p:nvSpPr>
         <p:spPr>
           <a:xfrm>
-            <a:off x="6227064" y="2724912"/>
-            <a:ext cx="2395728" cy="91440"/>
-          </a:xfrm>
-          <a:prstGeom prst="rect">
-            <a:avLst/>
-          </a:prstGeom>
-          <a:solidFill>
-            <a:srgbClr val="E8A338"/>
+            <a:off x="5109667" y="2414016"/>
+            <a:ext cx="1960473" cy="73152"/>
+          </a:xfrm>
+          <a:prstGeom prst="rect">
+            <a:avLst/>
+          </a:prstGeom>
+          <a:solidFill>
+            <a:srgbClr val="1FB5A6"/>
           </a:solidFill>
           <a:ln>
             <a:noFill/>
@@ -5110,14 +5639,14 @@
       </p:sp>
       <p:sp>
         <p:nvSpPr>
-          <p:cNvPr id="25" name="TextBox 24"/>
+          <p:cNvPr id="32" name="TextBox 31"/>
           <p:cNvSpPr txBox="1"/>
           <p:nvPr/>
         </p:nvSpPr>
         <p:spPr>
           <a:xfrm>
-            <a:off x="6355080" y="2926080"/>
-            <a:ext cx="2139696" cy="384048"/>
+            <a:off x="5201107" y="2560320"/>
+            <a:ext cx="1777593" cy="237744"/>
           </a:xfrm>
           <a:prstGeom prst="rect">
             <a:avLst/>
@@ -5131,125 +5660,40 @@
           <a:lstStyle/>
           <a:p>
             <a:r>
-              <a:rPr sz="1300" b="1">
-                <a:solidFill>
-                  <a:srgbClr val="E8A338"/>
+              <a:rPr sz="1100" b="1">
+                <a:solidFill>
+                  <a:srgbClr val="1FB5A6"/>
                 </a:solidFill>
                 <a:latin typeface="Calibri"/>
               </a:rPr>
-              <a:t>03  ANALYSIS</a:t>
-            </a:r>
-          </a:p>
-        </p:txBody>
-      </p:sp>
-      <p:sp>
-        <p:nvSpPr>
-          <p:cNvPr id="26" name="TextBox 25"/>
-          <p:cNvSpPr txBox="1"/>
-          <p:nvPr/>
-        </p:nvSpPr>
-        <p:spPr>
-          <a:xfrm>
-            <a:off x="6355080" y="3364992"/>
-            <a:ext cx="2139696" cy="1051560"/>
-          </a:xfrm>
-          <a:prstGeom prst="rect">
-            <a:avLst/>
-          </a:prstGeom>
-          <a:noFill/>
-        </p:spPr>
-        <p:txBody>
-          <a:bodyPr wrap="square">
-            <a:spAutoFit/>
-          </a:bodyPr>
-          <a:lstStyle/>
-          <a:p>
-            <a:pPr>
-              <a:spcAft>
-                <a:spcPts val="200"/>
-              </a:spcAft>
-            </a:pPr>
-            <a:r>
-              <a:rPr sz="1500" b="1">
-                <a:solidFill>
-                  <a:srgbClr val="1A2332"/>
-                </a:solidFill>
-                <a:latin typeface="Calibri"/>
-              </a:rPr>
-              <a:t>Elbow angle (image °)</a:t>
-            </a:r>
-          </a:p>
-          <a:p>
-            <a:pPr>
-              <a:spcAft>
-                <a:spcPts val="200"/>
-              </a:spcAft>
-            </a:pPr>
-            <a:r>
-              <a:rPr sz="1500" b="1">
-                <a:solidFill>
-                  <a:srgbClr val="1A2332"/>
-                </a:solidFill>
-                <a:latin typeface="Calibri"/>
-              </a:rPr>
-              <a:t>Wrist trail + px/s</a:t>
-            </a:r>
-          </a:p>
-        </p:txBody>
-      </p:sp>
-      <p:sp>
-        <p:nvSpPr>
-          <p:cNvPr id="27" name="TextBox 26"/>
-          <p:cNvSpPr txBox="1"/>
-          <p:nvPr/>
-        </p:nvSpPr>
-        <p:spPr>
-          <a:xfrm>
-            <a:off x="6355080" y="4507992"/>
-            <a:ext cx="2139696" cy="384048"/>
-          </a:xfrm>
-          <a:prstGeom prst="rect">
-            <a:avLst/>
-          </a:prstGeom>
-          <a:noFill/>
-        </p:spPr>
-        <p:txBody>
-          <a:bodyPr wrap="square">
-            <a:spAutoFit/>
-          </a:bodyPr>
-          <a:lstStyle/>
-          <a:p>
-            <a:r>
-              <a:rPr sz="1200" b="0">
-                <a:solidFill>
-                  <a:srgbClr val="5A6678"/>
-                </a:solidFill>
-                <a:latin typeface="Calibri"/>
-              </a:rPr>
-              <a:t>Skip low confidence</a:t>
-            </a:r>
-          </a:p>
-        </p:txBody>
-      </p:sp>
-      <p:sp>
-        <p:nvSpPr>
-          <p:cNvPr id="28" name="Right Arrow 27"/>
+              <a:t>03  MEDIAPIPE</a:t>
+            </a:r>
+          </a:p>
+        </p:txBody>
+      </p:sp>
+      <p:sp>
+        <p:nvSpPr>
+          <p:cNvPr id="33" name="Rounded Rectangle 32"/>
           <p:cNvSpPr/>
           <p:nvPr/>
         </p:nvSpPr>
         <p:spPr>
           <a:xfrm>
-            <a:off x="8714232" y="3685032"/>
-            <a:ext cx="329184" cy="292608"/>
-          </a:xfrm>
-          <a:prstGeom prst="rightArrow">
-            <a:avLst/>
-          </a:prstGeom>
-          <a:solidFill>
-            <a:srgbClr val="1FB5A6"/>
-          </a:solidFill>
-          <a:ln>
-            <a:noFill/>
+            <a:off x="5201107" y="2852928"/>
+            <a:ext cx="1777593" cy="420624"/>
+          </a:xfrm>
+          <a:prstGeom prst="roundRect">
+            <a:avLst>
+              <a:gd name="adj" fmla="val 18000"/>
+            </a:avLst>
+          </a:prstGeom>
+          <a:solidFill>
+            <a:srgbClr val="F6F3EE"/>
+          </a:solidFill>
+          <a:ln w="9525">
+            <a:solidFill>
+              <a:srgbClr val="E4E0D8"/>
+            </a:solidFill>
           </a:ln>
         </p:spPr>
         <p:style>
@@ -5276,14 +5720,208 @@
       </p:sp>
       <p:sp>
         <p:nvSpPr>
-          <p:cNvPr id="29" name="Rounded Rectangle 28"/>
+          <p:cNvPr id="34" name="TextBox 33"/>
+          <p:cNvSpPr txBox="1"/>
+          <p:nvPr/>
+        </p:nvSpPr>
+        <p:spPr>
+          <a:xfrm>
+            <a:off x="5255971" y="2926080"/>
+            <a:ext cx="1667865" cy="292608"/>
+          </a:xfrm>
+          <a:prstGeom prst="rect">
+            <a:avLst/>
+          </a:prstGeom>
+          <a:noFill/>
+        </p:spPr>
+        <p:txBody>
+          <a:bodyPr wrap="square">
+            <a:spAutoFit/>
+          </a:bodyPr>
+          <a:lstStyle/>
+          <a:p>
+            <a:pPr algn="ctr"/>
+            <a:r>
+              <a:rPr sz="1200" b="1">
+                <a:solidFill>
+                  <a:srgbClr val="1A2332"/>
+                </a:solidFill>
+                <a:latin typeface="Calibri"/>
+              </a:rPr>
+              <a:t>33 landmarks</a:t>
+            </a:r>
+          </a:p>
+        </p:txBody>
+      </p:sp>
+      <p:sp>
+        <p:nvSpPr>
+          <p:cNvPr id="35" name="Rounded Rectangle 34"/>
           <p:cNvSpPr/>
           <p:nvPr/>
         </p:nvSpPr>
         <p:spPr>
           <a:xfrm>
-            <a:off x="9134856" y="2724912"/>
-            <a:ext cx="2395728" cy="2331720"/>
+            <a:off x="5201107" y="3346704"/>
+            <a:ext cx="1777593" cy="420624"/>
+          </a:xfrm>
+          <a:prstGeom prst="roundRect">
+            <a:avLst>
+              <a:gd name="adj" fmla="val 18000"/>
+            </a:avLst>
+          </a:prstGeom>
+          <a:solidFill>
+            <a:srgbClr val="F6F3EE"/>
+          </a:solidFill>
+          <a:ln w="9525">
+            <a:solidFill>
+              <a:srgbClr val="E4E0D8"/>
+            </a:solidFill>
+          </a:ln>
+        </p:spPr>
+        <p:style>
+          <a:lnRef idx="1">
+            <a:schemeClr val="accent1"/>
+          </a:lnRef>
+          <a:fillRef idx="3">
+            <a:schemeClr val="accent1"/>
+          </a:fillRef>
+          <a:effectRef idx="2">
+            <a:schemeClr val="accent1"/>
+          </a:effectRef>
+          <a:fontRef idx="minor">
+            <a:schemeClr val="lt1"/>
+          </a:fontRef>
+        </p:style>
+        <p:txBody>
+          <a:bodyPr rtlCol="0" anchor="ctr"/>
+          <a:lstStyle/>
+          <a:p>
+            <a:pPr algn="ctr"/>
+          </a:p>
+        </p:txBody>
+      </p:sp>
+      <p:sp>
+        <p:nvSpPr>
+          <p:cNvPr id="36" name="TextBox 35"/>
+          <p:cNvSpPr txBox="1"/>
+          <p:nvPr/>
+        </p:nvSpPr>
+        <p:spPr>
+          <a:xfrm>
+            <a:off x="5255971" y="3419856"/>
+            <a:ext cx="1667865" cy="292608"/>
+          </a:xfrm>
+          <a:prstGeom prst="rect">
+            <a:avLst/>
+          </a:prstGeom>
+          <a:noFill/>
+        </p:spPr>
+        <p:txBody>
+          <a:bodyPr wrap="square">
+            <a:spAutoFit/>
+          </a:bodyPr>
+          <a:lstStyle/>
+          <a:p>
+            <a:pPr algn="ctr"/>
+            <a:r>
+              <a:rPr sz="1200" b="1">
+                <a:solidFill>
+                  <a:srgbClr val="1A2332"/>
+                </a:solidFill>
+                <a:latin typeface="Calibri"/>
+              </a:rPr>
+              <a:t>2D pixels (u, v)</a:t>
+            </a:r>
+          </a:p>
+        </p:txBody>
+      </p:sp>
+      <p:sp>
+        <p:nvSpPr>
+          <p:cNvPr id="37" name="TextBox 36"/>
+          <p:cNvSpPr txBox="1"/>
+          <p:nvPr/>
+        </p:nvSpPr>
+        <p:spPr>
+          <a:xfrm>
+            <a:off x="5201107" y="4151376"/>
+            <a:ext cx="1777593" cy="274320"/>
+          </a:xfrm>
+          <a:prstGeom prst="rect">
+            <a:avLst/>
+          </a:prstGeom>
+          <a:noFill/>
+        </p:spPr>
+        <p:txBody>
+          <a:bodyPr wrap="square">
+            <a:spAutoFit/>
+          </a:bodyPr>
+          <a:lstStyle/>
+          <a:p>
+            <a:r>
+              <a:rPr sz="1000" b="0">
+                <a:solidFill>
+                  <a:srgbClr val="5A6678"/>
+                </a:solidFill>
+                <a:latin typeface="Calibri"/>
+              </a:rPr>
+              <a:t>origin: top-left</a:t>
+            </a:r>
+          </a:p>
+        </p:txBody>
+      </p:sp>
+      <p:sp>
+        <p:nvSpPr>
+          <p:cNvPr id="38" name="Right Arrow 37"/>
+          <p:cNvSpPr/>
+          <p:nvPr/>
+        </p:nvSpPr>
+        <p:spPr>
+          <a:xfrm>
+            <a:off x="7143292" y="3364992"/>
+            <a:ext cx="256032" cy="182880"/>
+          </a:xfrm>
+          <a:prstGeom prst="rightArrow">
+            <a:avLst/>
+          </a:prstGeom>
+          <a:solidFill>
+            <a:srgbClr val="1FB5A6"/>
+          </a:solidFill>
+          <a:ln>
+            <a:noFill/>
+          </a:ln>
+        </p:spPr>
+        <p:style>
+          <a:lnRef idx="1">
+            <a:schemeClr val="accent1"/>
+          </a:lnRef>
+          <a:fillRef idx="3">
+            <a:schemeClr val="accent1"/>
+          </a:fillRef>
+          <a:effectRef idx="2">
+            <a:schemeClr val="accent1"/>
+          </a:effectRef>
+          <a:fontRef idx="minor">
+            <a:schemeClr val="lt1"/>
+          </a:fontRef>
+        </p:style>
+        <p:txBody>
+          <a:bodyPr rtlCol="0" anchor="ctr"/>
+          <a:lstStyle/>
+          <a:p>
+            <a:pPr algn="ctr"/>
+          </a:p>
+        </p:txBody>
+      </p:sp>
+      <p:sp>
+        <p:nvSpPr>
+          <p:cNvPr id="39" name="Rounded Rectangle 38"/>
+          <p:cNvSpPr/>
+          <p:nvPr/>
+        </p:nvSpPr>
+        <p:spPr>
+          <a:xfrm>
+            <a:off x="7490764" y="2414016"/>
+            <a:ext cx="1960473" cy="2084831"/>
           </a:xfrm>
           <a:prstGeom prst="roundRect">
             <a:avLst>
@@ -5323,20 +5961,20 @@
       </p:sp>
       <p:sp>
         <p:nvSpPr>
-          <p:cNvPr id="30" name="Rectangle 29"/>
+          <p:cNvPr id="40" name="Rectangle 39"/>
           <p:cNvSpPr/>
           <p:nvPr/>
         </p:nvSpPr>
         <p:spPr>
           <a:xfrm>
-            <a:off x="9134856" y="2724912"/>
-            <a:ext cx="2395728" cy="91440"/>
-          </a:xfrm>
-          <a:prstGeom prst="rect">
-            <a:avLst/>
-          </a:prstGeom>
-          <a:solidFill>
-            <a:srgbClr val="E06C5C"/>
+            <a:off x="7490764" y="2414016"/>
+            <a:ext cx="1960473" cy="73152"/>
+          </a:xfrm>
+          <a:prstGeom prst="rect">
+            <a:avLst/>
+          </a:prstGeom>
+          <a:solidFill>
+            <a:srgbClr val="E8A338"/>
           </a:solidFill>
           <a:ln>
             <a:noFill/>
@@ -5366,14 +6004,14 @@
       </p:sp>
       <p:sp>
         <p:nvSpPr>
-          <p:cNvPr id="31" name="TextBox 30"/>
+          <p:cNvPr id="41" name="TextBox 40"/>
           <p:cNvSpPr txBox="1"/>
           <p:nvPr/>
         </p:nvSpPr>
         <p:spPr>
           <a:xfrm>
-            <a:off x="9262872" y="2926080"/>
-            <a:ext cx="2139696" cy="384048"/>
+            <a:off x="7582204" y="2560320"/>
+            <a:ext cx="1777593" cy="237744"/>
           </a:xfrm>
           <a:prstGeom prst="rect">
             <a:avLst/>
@@ -5387,27 +6025,74 @@
           <a:lstStyle/>
           <a:p>
             <a:r>
-              <a:rPr sz="1300" b="1">
-                <a:solidFill>
-                  <a:srgbClr val="E06C5C"/>
+              <a:rPr sz="1100" b="1">
+                <a:solidFill>
+                  <a:srgbClr val="E8A338"/>
                 </a:solidFill>
                 <a:latin typeface="Calibri"/>
               </a:rPr>
-              <a:t>04  OUTPUT</a:t>
-            </a:r>
-          </a:p>
-        </p:txBody>
-      </p:sp>
-      <p:sp>
-        <p:nvSpPr>
-          <p:cNvPr id="32" name="TextBox 31"/>
+              <a:t>04  ANALYSIS</a:t>
+            </a:r>
+          </a:p>
+        </p:txBody>
+      </p:sp>
+      <p:sp>
+        <p:nvSpPr>
+          <p:cNvPr id="42" name="Rounded Rectangle 41"/>
+          <p:cNvSpPr/>
+          <p:nvPr/>
+        </p:nvSpPr>
+        <p:spPr>
+          <a:xfrm>
+            <a:off x="7582204" y="2852928"/>
+            <a:ext cx="1777593" cy="420624"/>
+          </a:xfrm>
+          <a:prstGeom prst="roundRect">
+            <a:avLst>
+              <a:gd name="adj" fmla="val 18000"/>
+            </a:avLst>
+          </a:prstGeom>
+          <a:solidFill>
+            <a:srgbClr val="F6F3EE"/>
+          </a:solidFill>
+          <a:ln w="9525">
+            <a:solidFill>
+              <a:srgbClr val="E4E0D8"/>
+            </a:solidFill>
+          </a:ln>
+        </p:spPr>
+        <p:style>
+          <a:lnRef idx="1">
+            <a:schemeClr val="accent1"/>
+          </a:lnRef>
+          <a:fillRef idx="3">
+            <a:schemeClr val="accent1"/>
+          </a:fillRef>
+          <a:effectRef idx="2">
+            <a:schemeClr val="accent1"/>
+          </a:effectRef>
+          <a:fontRef idx="minor">
+            <a:schemeClr val="lt1"/>
+          </a:fontRef>
+        </p:style>
+        <p:txBody>
+          <a:bodyPr rtlCol="0" anchor="ctr"/>
+          <a:lstStyle/>
+          <a:p>
+            <a:pPr algn="ctr"/>
+          </a:p>
+        </p:txBody>
+      </p:sp>
+      <p:sp>
+        <p:nvSpPr>
+          <p:cNvPr id="43" name="TextBox 42"/>
           <p:cNvSpPr txBox="1"/>
           <p:nvPr/>
         </p:nvSpPr>
         <p:spPr>
           <a:xfrm>
-            <a:off x="9262872" y="3364992"/>
-            <a:ext cx="2139696" cy="1051560"/>
+            <a:off x="7637068" y="2926080"/>
+            <a:ext cx="1667865" cy="292608"/>
           </a:xfrm>
           <a:prstGeom prst="rect">
             <a:avLst/>
@@ -5420,49 +6105,76 @@
           </a:bodyPr>
           <a:lstStyle/>
           <a:p>
-            <a:pPr>
-              <a:spcAft>
-                <a:spcPts val="200"/>
-              </a:spcAft>
-            </a:pPr>
-            <a:r>
-              <a:rPr sz="1500" b="1">
+            <a:pPr algn="ctr"/>
+            <a:r>
+              <a:rPr sz="1200" b="1">
                 <a:solidFill>
                   <a:srgbClr val="1A2332"/>
                 </a:solidFill>
                 <a:latin typeface="Calibri"/>
               </a:rPr>
-              <a:t>GUI live numbers</a:t>
-            </a:r>
-          </a:p>
-          <a:p>
-            <a:pPr>
-              <a:spcAft>
-                <a:spcPts val="200"/>
-              </a:spcAft>
-            </a:pPr>
-            <a:r>
-              <a:rPr sz="1500" b="1">
-                <a:solidFill>
-                  <a:srgbClr val="1A2332"/>
-                </a:solidFill>
-                <a:latin typeface="Calibri"/>
-              </a:rPr>
-              <a:t>CSV + overlay.mp4</a:t>
-            </a:r>
-          </a:p>
-        </p:txBody>
-      </p:sp>
-      <p:sp>
-        <p:nvSpPr>
-          <p:cNvPr id="33" name="TextBox 32"/>
+              <a:t>Elbow angle (image °)</a:t>
+            </a:r>
+          </a:p>
+        </p:txBody>
+      </p:sp>
+      <p:sp>
+        <p:nvSpPr>
+          <p:cNvPr id="44" name="Rounded Rectangle 43"/>
+          <p:cNvSpPr/>
+          <p:nvPr/>
+        </p:nvSpPr>
+        <p:spPr>
+          <a:xfrm>
+            <a:off x="7582204" y="3346704"/>
+            <a:ext cx="1777593" cy="420624"/>
+          </a:xfrm>
+          <a:prstGeom prst="roundRect">
+            <a:avLst>
+              <a:gd name="adj" fmla="val 18000"/>
+            </a:avLst>
+          </a:prstGeom>
+          <a:solidFill>
+            <a:srgbClr val="F6F3EE"/>
+          </a:solidFill>
+          <a:ln w="9525">
+            <a:solidFill>
+              <a:srgbClr val="E4E0D8"/>
+            </a:solidFill>
+          </a:ln>
+        </p:spPr>
+        <p:style>
+          <a:lnRef idx="1">
+            <a:schemeClr val="accent1"/>
+          </a:lnRef>
+          <a:fillRef idx="3">
+            <a:schemeClr val="accent1"/>
+          </a:fillRef>
+          <a:effectRef idx="2">
+            <a:schemeClr val="accent1"/>
+          </a:effectRef>
+          <a:fontRef idx="minor">
+            <a:schemeClr val="lt1"/>
+          </a:fontRef>
+        </p:style>
+        <p:txBody>
+          <a:bodyPr rtlCol="0" anchor="ctr"/>
+          <a:lstStyle/>
+          <a:p>
+            <a:pPr algn="ctr"/>
+          </a:p>
+        </p:txBody>
+      </p:sp>
+      <p:sp>
+        <p:nvSpPr>
+          <p:cNvPr id="45" name="TextBox 44"/>
           <p:cNvSpPr txBox="1"/>
           <p:nvPr/>
         </p:nvSpPr>
         <p:spPr>
           <a:xfrm>
-            <a:off x="9262872" y="4507992"/>
-            <a:ext cx="2139696" cy="384048"/>
+            <a:off x="7637068" y="3419856"/>
+            <a:ext cx="1667865" cy="292608"/>
           </a:xfrm>
           <a:prstGeom prst="rect">
             <a:avLst/>
@@ -5475,28 +6187,106 @@
           </a:bodyPr>
           <a:lstStyle/>
           <a:p>
-            <a:r>
-              <a:rPr sz="1200" b="0">
-                <a:solidFill>
-                  <a:srgbClr val="5A6678"/>
+            <a:pPr algn="ctr"/>
+            <a:r>
+              <a:rPr sz="1200" b="1">
+                <a:solidFill>
+                  <a:srgbClr val="1A2332"/>
                 </a:solidFill>
                 <a:latin typeface="Calibri"/>
               </a:rPr>
-              <a:t>Start / Stop</a:t>
-            </a:r>
-          </a:p>
-        </p:txBody>
-      </p:sp>
-      <p:sp>
-        <p:nvSpPr>
-          <p:cNvPr id="34" name="Rounded Rectangle 33"/>
+              <a:t>Wrist trail + px/s</a:t>
+            </a:r>
+          </a:p>
+        </p:txBody>
+      </p:sp>
+      <p:sp>
+        <p:nvSpPr>
+          <p:cNvPr id="46" name="TextBox 45"/>
+          <p:cNvSpPr txBox="1"/>
+          <p:nvPr/>
+        </p:nvSpPr>
+        <p:spPr>
+          <a:xfrm>
+            <a:off x="7582204" y="4151376"/>
+            <a:ext cx="1777593" cy="274320"/>
+          </a:xfrm>
+          <a:prstGeom prst="rect">
+            <a:avLst/>
+          </a:prstGeom>
+          <a:noFill/>
+        </p:spPr>
+        <p:txBody>
+          <a:bodyPr wrap="square">
+            <a:spAutoFit/>
+          </a:bodyPr>
+          <a:lstStyle/>
+          <a:p>
+            <a:r>
+              <a:rPr sz="1000" b="0">
+                <a:solidFill>
+                  <a:srgbClr val="5A6678"/>
+                </a:solidFill>
+                <a:latin typeface="Calibri"/>
+              </a:rPr>
+              <a:t>angles  +  trajectory</a:t>
+            </a:r>
+          </a:p>
+        </p:txBody>
+      </p:sp>
+      <p:sp>
+        <p:nvSpPr>
+          <p:cNvPr id="47" name="Right Arrow 46"/>
           <p:cNvSpPr/>
           <p:nvPr/>
         </p:nvSpPr>
         <p:spPr>
           <a:xfrm>
-            <a:off x="411480" y="5212080"/>
-            <a:ext cx="3703320" cy="1097280"/>
+            <a:off x="9524390" y="3364992"/>
+            <a:ext cx="256032" cy="182880"/>
+          </a:xfrm>
+          <a:prstGeom prst="rightArrow">
+            <a:avLst/>
+          </a:prstGeom>
+          <a:solidFill>
+            <a:srgbClr val="1FB5A6"/>
+          </a:solidFill>
+          <a:ln>
+            <a:noFill/>
+          </a:ln>
+        </p:spPr>
+        <p:style>
+          <a:lnRef idx="1">
+            <a:schemeClr val="accent1"/>
+          </a:lnRef>
+          <a:fillRef idx="3">
+            <a:schemeClr val="accent1"/>
+          </a:fillRef>
+          <a:effectRef idx="2">
+            <a:schemeClr val="accent1"/>
+          </a:effectRef>
+          <a:fontRef idx="minor">
+            <a:schemeClr val="lt1"/>
+          </a:fontRef>
+        </p:style>
+        <p:txBody>
+          <a:bodyPr rtlCol="0" anchor="ctr"/>
+          <a:lstStyle/>
+          <a:p>
+            <a:pPr algn="ctr"/>
+          </a:p>
+        </p:txBody>
+      </p:sp>
+      <p:sp>
+        <p:nvSpPr>
+          <p:cNvPr id="48" name="Rounded Rectangle 47"/>
+          <p:cNvSpPr/>
+          <p:nvPr/>
+        </p:nvSpPr>
+        <p:spPr>
+          <a:xfrm>
+            <a:off x="9871862" y="2414016"/>
+            <a:ext cx="1960473" cy="2084831"/>
           </a:xfrm>
           <a:prstGeom prst="roundRect">
             <a:avLst>
@@ -5536,20 +6326,20 @@
       </p:sp>
       <p:sp>
         <p:nvSpPr>
-          <p:cNvPr id="35" name="Rectangle 34"/>
+          <p:cNvPr id="49" name="Rectangle 48"/>
           <p:cNvSpPr/>
           <p:nvPr/>
         </p:nvSpPr>
         <p:spPr>
           <a:xfrm>
-            <a:off x="411480" y="5212080"/>
-            <a:ext cx="91440" cy="1097280"/>
-          </a:xfrm>
-          <a:prstGeom prst="rect">
-            <a:avLst/>
-          </a:prstGeom>
-          <a:solidFill>
-            <a:srgbClr val="1FB5A6"/>
+            <a:off x="9871862" y="2414016"/>
+            <a:ext cx="1960473" cy="73152"/>
+          </a:xfrm>
+          <a:prstGeom prst="rect">
+            <a:avLst/>
+          </a:prstGeom>
+          <a:solidFill>
+            <a:srgbClr val="E06C5C"/>
           </a:solidFill>
           <a:ln>
             <a:noFill/>
@@ -5579,14 +6369,14 @@
       </p:sp>
       <p:sp>
         <p:nvSpPr>
-          <p:cNvPr id="36" name="TextBox 35"/>
+          <p:cNvPr id="50" name="TextBox 49"/>
           <p:cNvSpPr txBox="1"/>
           <p:nvPr/>
         </p:nvSpPr>
         <p:spPr>
           <a:xfrm>
-            <a:off x="667512" y="5486400"/>
-            <a:ext cx="3319272" cy="566928"/>
+            <a:off x="9963302" y="2560320"/>
+            <a:ext cx="1777593" cy="237744"/>
           </a:xfrm>
           <a:prstGeom prst="rect">
             <a:avLst/>
@@ -5594,43 +6384,43 @@
           <a:noFill/>
         </p:spPr>
         <p:txBody>
-          <a:bodyPr wrap="square">
+          <a:bodyPr wrap="none">
             <a:spAutoFit/>
           </a:bodyPr>
           <a:lstStyle/>
           <a:p>
             <a:r>
-              <a:rPr sz="1400" b="1">
-                <a:solidFill>
-                  <a:srgbClr val="1A2332"/>
+              <a:rPr sz="1100" b="1">
+                <a:solidFill>
+                  <a:srgbClr val="E06C5C"/>
                 </a:solidFill>
                 <a:latin typeface="Calibri"/>
               </a:rPr>
-              <a:t>Live  or  Upload</a:t>
-            </a:r>
-          </a:p>
-        </p:txBody>
-      </p:sp>
-      <p:sp>
-        <p:nvSpPr>
-          <p:cNvPr id="37" name="Rounded Rectangle 36"/>
+              <a:t>05  OUTPUT</a:t>
+            </a:r>
+          </a:p>
+        </p:txBody>
+      </p:sp>
+      <p:sp>
+        <p:nvSpPr>
+          <p:cNvPr id="51" name="Rounded Rectangle 50"/>
           <p:cNvSpPr/>
           <p:nvPr/>
         </p:nvSpPr>
         <p:spPr>
           <a:xfrm>
-            <a:off x="4315968" y="5212080"/>
-            <a:ext cx="3703320" cy="1097280"/>
+            <a:off x="9963302" y="2852928"/>
+            <a:ext cx="1777593" cy="420624"/>
           </a:xfrm>
           <a:prstGeom prst="roundRect">
             <a:avLst>
-              <a:gd name="adj" fmla="val 8000"/>
+              <a:gd name="adj" fmla="val 18000"/>
             </a:avLst>
           </a:prstGeom>
           <a:solidFill>
-            <a:srgbClr val="FFFFFF"/>
-          </a:solidFill>
-          <a:ln w="12700">
+            <a:srgbClr val="F6F3EE"/>
+          </a:solidFill>
+          <a:ln w="9525">
             <a:solidFill>
               <a:srgbClr val="E4E0D8"/>
             </a:solidFill>
@@ -5660,23 +6450,62 @@
       </p:sp>
       <p:sp>
         <p:nvSpPr>
-          <p:cNvPr id="38" name="Rectangle 37"/>
+          <p:cNvPr id="52" name="TextBox 51"/>
+          <p:cNvSpPr txBox="1"/>
+          <p:nvPr/>
+        </p:nvSpPr>
+        <p:spPr>
+          <a:xfrm>
+            <a:off x="10018166" y="2926080"/>
+            <a:ext cx="1667865" cy="292608"/>
+          </a:xfrm>
+          <a:prstGeom prst="rect">
+            <a:avLst/>
+          </a:prstGeom>
+          <a:noFill/>
+        </p:spPr>
+        <p:txBody>
+          <a:bodyPr wrap="square">
+            <a:spAutoFit/>
+          </a:bodyPr>
+          <a:lstStyle/>
+          <a:p>
+            <a:pPr algn="ctr"/>
+            <a:r>
+              <a:rPr sz="1200" b="1">
+                <a:solidFill>
+                  <a:srgbClr val="1A2332"/>
+                </a:solidFill>
+                <a:latin typeface="Calibri"/>
+              </a:rPr>
+              <a:t>Visualization &amp; report</a:t>
+            </a:r>
+          </a:p>
+        </p:txBody>
+      </p:sp>
+      <p:sp>
+        <p:nvSpPr>
+          <p:cNvPr id="53" name="Rounded Rectangle 52"/>
           <p:cNvSpPr/>
           <p:nvPr/>
         </p:nvSpPr>
         <p:spPr>
           <a:xfrm>
-            <a:off x="4315968" y="5212080"/>
-            <a:ext cx="91440" cy="1097280"/>
-          </a:xfrm>
-          <a:prstGeom prst="rect">
-            <a:avLst/>
-          </a:prstGeom>
-          <a:solidFill>
-            <a:srgbClr val="E8A338"/>
-          </a:solidFill>
-          <a:ln>
-            <a:noFill/>
+            <a:off x="9963302" y="3346704"/>
+            <a:ext cx="1777593" cy="420624"/>
+          </a:xfrm>
+          <a:prstGeom prst="roundRect">
+            <a:avLst>
+              <a:gd name="adj" fmla="val 18000"/>
+            </a:avLst>
+          </a:prstGeom>
+          <a:solidFill>
+            <a:srgbClr val="F6F3EE"/>
+          </a:solidFill>
+          <a:ln w="9525">
+            <a:solidFill>
+              <a:srgbClr val="E4E0D8"/>
+            </a:solidFill>
           </a:ln>
         </p:spPr>
         <p:style>
@@ -5703,14 +6532,14 @@
       </p:sp>
       <p:sp>
         <p:nvSpPr>
-          <p:cNvPr id="39" name="TextBox 38"/>
+          <p:cNvPr id="54" name="TextBox 53"/>
           <p:cNvSpPr txBox="1"/>
           <p:nvPr/>
         </p:nvSpPr>
         <p:spPr>
           <a:xfrm>
-            <a:off x="4572000" y="5486400"/>
-            <a:ext cx="3319272" cy="566928"/>
+            <a:off x="10018166" y="3419856"/>
+            <a:ext cx="1667865" cy="292608"/>
           </a:xfrm>
           <a:prstGeom prst="rect">
             <a:avLst/>
@@ -5723,41 +6552,77 @@
           </a:bodyPr>
           <a:lstStyle/>
           <a:p>
-            <a:r>
-              <a:rPr sz="1400" b="1">
+            <a:pPr algn="ctr"/>
+            <a:r>
+              <a:rPr sz="1200" b="1">
                 <a:solidFill>
                   <a:srgbClr val="1A2332"/>
                 </a:solidFill>
                 <a:latin typeface="Calibri"/>
               </a:rPr>
-              <a:t>Elbow ° in the image   ·   ~180° = straight</a:t>
-            </a:r>
-          </a:p>
-        </p:txBody>
-      </p:sp>
-      <p:sp>
-        <p:nvSpPr>
-          <p:cNvPr id="40" name="Rounded Rectangle 39"/>
+              <a:t>CSV + overlay video</a:t>
+            </a:r>
+          </a:p>
+        </p:txBody>
+      </p:sp>
+      <p:sp>
+        <p:nvSpPr>
+          <p:cNvPr id="55" name="TextBox 54"/>
+          <p:cNvSpPr txBox="1"/>
+          <p:nvPr/>
+        </p:nvSpPr>
+        <p:spPr>
+          <a:xfrm>
+            <a:off x="9963302" y="4151376"/>
+            <a:ext cx="1777593" cy="274320"/>
+          </a:xfrm>
+          <a:prstGeom prst="rect">
+            <a:avLst/>
+          </a:prstGeom>
+          <a:noFill/>
+        </p:spPr>
+        <p:txBody>
+          <a:bodyPr wrap="square">
+            <a:spAutoFit/>
+          </a:bodyPr>
+          <a:lstStyle/>
+          <a:p>
+            <a:r>
+              <a:rPr sz="1000" b="0">
+                <a:solidFill>
+                  <a:srgbClr val="5A6678"/>
+                </a:solidFill>
+                <a:latin typeface="Calibri"/>
+              </a:rPr>
+              <a:t>post-session graphs</a:t>
+            </a:r>
+          </a:p>
+        </p:txBody>
+      </p:sp>
+      <p:sp>
+        <p:nvSpPr>
+          <p:cNvPr id="56" name="Rounded Rectangle 55"/>
           <p:cNvSpPr/>
           <p:nvPr/>
         </p:nvSpPr>
         <p:spPr>
           <a:xfrm>
-            <a:off x="8220456" y="5212080"/>
-            <a:ext cx="3703320" cy="1097280"/>
+            <a:off x="347472" y="4645152"/>
+            <a:ext cx="11484864" cy="1737360"/>
           </a:xfrm>
           <a:prstGeom prst="roundRect">
             <a:avLst>
-              <a:gd name="adj" fmla="val 8000"/>
+              <a:gd name="adj" fmla="val 4000"/>
             </a:avLst>
           </a:prstGeom>
           <a:solidFill>
             <a:srgbClr val="FFFFFF"/>
           </a:solidFill>
-          <a:ln w="12700">
+          <a:ln w="22225">
             <a:solidFill>
-              <a:srgbClr val="E4E0D8"/>
+              <a:srgbClr val="E8A338"/>
             </a:solidFill>
+            <a:prstDash val="dash"/>
           </a:ln>
         </p:spPr>
         <p:style>
@@ -5784,23 +6649,63 @@
       </p:sp>
       <p:sp>
         <p:nvSpPr>
-          <p:cNvPr id="41" name="Rectangle 40"/>
+          <p:cNvPr id="57" name="TextBox 56"/>
+          <p:cNvSpPr txBox="1"/>
+          <p:nvPr/>
+        </p:nvSpPr>
+        <p:spPr>
+          <a:xfrm>
+            <a:off x="457200" y="4718304"/>
+            <a:ext cx="11265408" cy="237744"/>
+          </a:xfrm>
+          <a:prstGeom prst="rect">
+            <a:avLst/>
+          </a:prstGeom>
+          <a:noFill/>
+        </p:spPr>
+        <p:txBody>
+          <a:bodyPr wrap="square">
+            <a:spAutoFit/>
+          </a:bodyPr>
+          <a:lstStyle/>
+          <a:p>
+            <a:pPr algn="ctr"/>
+            <a:r>
+              <a:rPr sz="1100" b="1">
+                <a:solidFill>
+                  <a:srgbClr val="E8A338"/>
+                </a:solidFill>
+                <a:latin typeface="Calibri"/>
+              </a:rPr>
+              <a:t>3D EXTENSION   ·   NEXT PHASE   ·   NOT IMPLEMENTED</a:t>
+            </a:r>
+          </a:p>
+        </p:txBody>
+      </p:sp>
+      <p:sp>
+        <p:nvSpPr>
+          <p:cNvPr id="58" name="Rounded Rectangle 57"/>
           <p:cNvSpPr/>
           <p:nvPr/>
         </p:nvSpPr>
         <p:spPr>
           <a:xfrm>
-            <a:off x="8220456" y="5212080"/>
-            <a:ext cx="91440" cy="1097280"/>
-          </a:xfrm>
-          <a:prstGeom prst="rect">
-            <a:avLst/>
-          </a:prstGeom>
-          <a:solidFill>
-            <a:srgbClr val="E06C5C"/>
-          </a:solidFill>
-          <a:ln>
-            <a:noFill/>
+            <a:off x="530352" y="5029200"/>
+            <a:ext cx="1945843" cy="1207008"/>
+          </a:xfrm>
+          <a:prstGeom prst="roundRect">
+            <a:avLst>
+              <a:gd name="adj" fmla="val 10000"/>
+            </a:avLst>
+          </a:prstGeom>
+          <a:solidFill>
+            <a:srgbClr val="F6F3EE"/>
+          </a:solidFill>
+          <a:ln w="15875">
+            <a:solidFill>
+              <a:srgbClr val="E8A338"/>
+            </a:solidFill>
+            <a:prstDash val="dash"/>
           </a:ln>
         </p:spPr>
         <p:style>
@@ -5827,14 +6732,14 @@
       </p:sp>
       <p:sp>
         <p:nvSpPr>
-          <p:cNvPr id="42" name="TextBox 41"/>
+          <p:cNvPr id="59" name="TextBox 58"/>
           <p:cNvSpPr txBox="1"/>
           <p:nvPr/>
         </p:nvSpPr>
         <p:spPr>
           <a:xfrm>
-            <a:off x="8476488" y="5486400"/>
-            <a:ext cx="3319272" cy="566928"/>
+            <a:off x="603503" y="5230368"/>
+            <a:ext cx="1799539" cy="841248"/>
           </a:xfrm>
           <a:prstGeom prst="rect">
             <a:avLst/>
@@ -5847,34 +6752,55 @@
           </a:bodyPr>
           <a:lstStyle/>
           <a:p>
-            <a:r>
-              <a:rPr sz="1400" b="1">
-                <a:solidFill>
-                  <a:srgbClr val="1A2332"/>
+            <a:pPr algn="ctr">
+              <a:spcAft>
+                <a:spcPts val="100"/>
+              </a:spcAft>
+            </a:pPr>
+            <a:r>
+              <a:rPr sz="1200" b="1">
+                <a:solidFill>
+                  <a:srgbClr val="5A6678"/>
                 </a:solidFill>
                 <a:latin typeface="Calibri"/>
               </a:rPr>
-              <a:t>Wrist speed in px/s   ·   not m/s</a:t>
-            </a:r>
-          </a:p>
-        </p:txBody>
-      </p:sp>
-      <p:sp>
-        <p:nvSpPr>
-          <p:cNvPr id="43" name="Rectangle 42"/>
+              <a:t>2D pixel (u, v)</a:t>
+            </a:r>
+          </a:p>
+          <a:p>
+            <a:pPr algn="ctr">
+              <a:spcAft>
+                <a:spcPts val="100"/>
+              </a:spcAft>
+            </a:pPr>
+            <a:r>
+              <a:rPr sz="1200" b="1">
+                <a:solidFill>
+                  <a:srgbClr val="5A6678"/>
+                </a:solidFill>
+                <a:latin typeface="Calibri"/>
+              </a:rPr>
+              <a:t>+ RealSense depth</a:t>
+            </a:r>
+          </a:p>
+        </p:txBody>
+      </p:sp>
+      <p:sp>
+        <p:nvSpPr>
+          <p:cNvPr id="60" name="Right Arrow 59"/>
           <p:cNvSpPr/>
           <p:nvPr/>
         </p:nvSpPr>
         <p:spPr>
           <a:xfrm>
-            <a:off x="0" y="6510528"/>
-            <a:ext cx="12191695" cy="347472"/>
-          </a:xfrm>
-          <a:prstGeom prst="rect">
-            <a:avLst/>
-          </a:prstGeom>
-          <a:solidFill>
-            <a:srgbClr val="0B1F3A"/>
+            <a:off x="2531059" y="5541264"/>
+            <a:ext cx="256032" cy="182880"/>
+          </a:xfrm>
+          <a:prstGeom prst="rightArrow">
+            <a:avLst/>
+          </a:prstGeom>
+          <a:solidFill>
+            <a:srgbClr val="E8A338"/>
           </a:solidFill>
           <a:ln>
             <a:noFill/>
@@ -5904,7 +6830,591 @@
       </p:sp>
       <p:sp>
         <p:nvSpPr>
-          <p:cNvPr id="44" name="TextBox 43"/>
+          <p:cNvPr id="61" name="Rounded Rectangle 60"/>
+          <p:cNvSpPr/>
+          <p:nvPr/>
+        </p:nvSpPr>
+        <p:spPr>
+          <a:xfrm>
+            <a:off x="2823667" y="5029200"/>
+            <a:ext cx="1945843" cy="1207008"/>
+          </a:xfrm>
+          <a:prstGeom prst="roundRect">
+            <a:avLst>
+              <a:gd name="adj" fmla="val 10000"/>
+            </a:avLst>
+          </a:prstGeom>
+          <a:solidFill>
+            <a:srgbClr val="F6F3EE"/>
+          </a:solidFill>
+          <a:ln w="15875">
+            <a:solidFill>
+              <a:srgbClr val="E8A338"/>
+            </a:solidFill>
+            <a:prstDash val="dash"/>
+          </a:ln>
+        </p:spPr>
+        <p:style>
+          <a:lnRef idx="1">
+            <a:schemeClr val="accent1"/>
+          </a:lnRef>
+          <a:fillRef idx="3">
+            <a:schemeClr val="accent1"/>
+          </a:fillRef>
+          <a:effectRef idx="2">
+            <a:schemeClr val="accent1"/>
+          </a:effectRef>
+          <a:fontRef idx="minor">
+            <a:schemeClr val="lt1"/>
+          </a:fontRef>
+        </p:style>
+        <p:txBody>
+          <a:bodyPr rtlCol="0" anchor="ctr"/>
+          <a:lstStyle/>
+          <a:p>
+            <a:pPr algn="ctr"/>
+          </a:p>
+        </p:txBody>
+      </p:sp>
+      <p:sp>
+        <p:nvSpPr>
+          <p:cNvPr id="62" name="TextBox 61"/>
+          <p:cNvSpPr txBox="1"/>
+          <p:nvPr/>
+        </p:nvSpPr>
+        <p:spPr>
+          <a:xfrm>
+            <a:off x="2896819" y="5230368"/>
+            <a:ext cx="1799539" cy="841248"/>
+          </a:xfrm>
+          <a:prstGeom prst="rect">
+            <a:avLst/>
+          </a:prstGeom>
+          <a:noFill/>
+        </p:spPr>
+        <p:txBody>
+          <a:bodyPr wrap="square">
+            <a:spAutoFit/>
+          </a:bodyPr>
+          <a:lstStyle/>
+          <a:p>
+            <a:pPr algn="ctr">
+              <a:spcAft>
+                <a:spcPts val="100"/>
+              </a:spcAft>
+            </a:pPr>
+            <a:r>
+              <a:rPr sz="1200" b="1">
+                <a:solidFill>
+                  <a:srgbClr val="5A6678"/>
+                </a:solidFill>
+                <a:latin typeface="Calibri"/>
+              </a:rPr>
+              <a:t>Depth</a:t>
+            </a:r>
+          </a:p>
+          <a:p>
+            <a:pPr algn="ctr">
+              <a:spcAft>
+                <a:spcPts val="100"/>
+              </a:spcAft>
+            </a:pPr>
+            <a:r>
+              <a:rPr sz="1200" b="1">
+                <a:solidFill>
+                  <a:srgbClr val="5A6678"/>
+                </a:solidFill>
+                <a:latin typeface="Calibri"/>
+              </a:rPr>
+              <a:t>alignment</a:t>
+            </a:r>
+          </a:p>
+        </p:txBody>
+      </p:sp>
+      <p:sp>
+        <p:nvSpPr>
+          <p:cNvPr id="63" name="Right Arrow 62"/>
+          <p:cNvSpPr/>
+          <p:nvPr/>
+        </p:nvSpPr>
+        <p:spPr>
+          <a:xfrm>
+            <a:off x="4824374" y="5541264"/>
+            <a:ext cx="256032" cy="182880"/>
+          </a:xfrm>
+          <a:prstGeom prst="rightArrow">
+            <a:avLst/>
+          </a:prstGeom>
+          <a:solidFill>
+            <a:srgbClr val="E8A338"/>
+          </a:solidFill>
+          <a:ln>
+            <a:noFill/>
+          </a:ln>
+        </p:spPr>
+        <p:style>
+          <a:lnRef idx="1">
+            <a:schemeClr val="accent1"/>
+          </a:lnRef>
+          <a:fillRef idx="3">
+            <a:schemeClr val="accent1"/>
+          </a:fillRef>
+          <a:effectRef idx="2">
+            <a:schemeClr val="accent1"/>
+          </a:effectRef>
+          <a:fontRef idx="minor">
+            <a:schemeClr val="lt1"/>
+          </a:fontRef>
+        </p:style>
+        <p:txBody>
+          <a:bodyPr rtlCol="0" anchor="ctr"/>
+          <a:lstStyle/>
+          <a:p>
+            <a:pPr algn="ctr"/>
+          </a:p>
+        </p:txBody>
+      </p:sp>
+      <p:sp>
+        <p:nvSpPr>
+          <p:cNvPr id="64" name="Rounded Rectangle 63"/>
+          <p:cNvSpPr/>
+          <p:nvPr/>
+        </p:nvSpPr>
+        <p:spPr>
+          <a:xfrm>
+            <a:off x="5116982" y="5029200"/>
+            <a:ext cx="1945843" cy="1207008"/>
+          </a:xfrm>
+          <a:prstGeom prst="roundRect">
+            <a:avLst>
+              <a:gd name="adj" fmla="val 10000"/>
+            </a:avLst>
+          </a:prstGeom>
+          <a:solidFill>
+            <a:srgbClr val="F6F3EE"/>
+          </a:solidFill>
+          <a:ln w="15875">
+            <a:solidFill>
+              <a:srgbClr val="E8A338"/>
+            </a:solidFill>
+            <a:prstDash val="dash"/>
+          </a:ln>
+        </p:spPr>
+        <p:style>
+          <a:lnRef idx="1">
+            <a:schemeClr val="accent1"/>
+          </a:lnRef>
+          <a:fillRef idx="3">
+            <a:schemeClr val="accent1"/>
+          </a:fillRef>
+          <a:effectRef idx="2">
+            <a:schemeClr val="accent1"/>
+          </a:effectRef>
+          <a:fontRef idx="minor">
+            <a:schemeClr val="lt1"/>
+          </a:fontRef>
+        </p:style>
+        <p:txBody>
+          <a:bodyPr rtlCol="0" anchor="ctr"/>
+          <a:lstStyle/>
+          <a:p>
+            <a:pPr algn="ctr"/>
+          </a:p>
+        </p:txBody>
+      </p:sp>
+      <p:sp>
+        <p:nvSpPr>
+          <p:cNvPr id="65" name="TextBox 64"/>
+          <p:cNvSpPr txBox="1"/>
+          <p:nvPr/>
+        </p:nvSpPr>
+        <p:spPr>
+          <a:xfrm>
+            <a:off x="5190134" y="5230368"/>
+            <a:ext cx="1799539" cy="841248"/>
+          </a:xfrm>
+          <a:prstGeom prst="rect">
+            <a:avLst/>
+          </a:prstGeom>
+          <a:noFill/>
+        </p:spPr>
+        <p:txBody>
+          <a:bodyPr wrap="square">
+            <a:spAutoFit/>
+          </a:bodyPr>
+          <a:lstStyle/>
+          <a:p>
+            <a:pPr algn="ctr">
+              <a:spcAft>
+                <a:spcPts val="100"/>
+              </a:spcAft>
+            </a:pPr>
+            <a:r>
+              <a:rPr sz="1200" b="1">
+                <a:solidFill>
+                  <a:srgbClr val="5A6678"/>
+                </a:solidFill>
+                <a:latin typeface="Calibri"/>
+              </a:rPr>
+              <a:t>3D</a:t>
+            </a:r>
+          </a:p>
+          <a:p>
+            <a:pPr algn="ctr">
+              <a:spcAft>
+                <a:spcPts val="100"/>
+              </a:spcAft>
+            </a:pPr>
+            <a:r>
+              <a:rPr sz="1200" b="1">
+                <a:solidFill>
+                  <a:srgbClr val="5A6678"/>
+                </a:solidFill>
+                <a:latin typeface="Calibri"/>
+              </a:rPr>
+              <a:t>deprojection</a:t>
+            </a:r>
+          </a:p>
+        </p:txBody>
+      </p:sp>
+      <p:sp>
+        <p:nvSpPr>
+          <p:cNvPr id="66" name="Right Arrow 65"/>
+          <p:cNvSpPr/>
+          <p:nvPr/>
+        </p:nvSpPr>
+        <p:spPr>
+          <a:xfrm>
+            <a:off x="7117689" y="5541264"/>
+            <a:ext cx="256032" cy="182880"/>
+          </a:xfrm>
+          <a:prstGeom prst="rightArrow">
+            <a:avLst/>
+          </a:prstGeom>
+          <a:solidFill>
+            <a:srgbClr val="E8A338"/>
+          </a:solidFill>
+          <a:ln>
+            <a:noFill/>
+          </a:ln>
+        </p:spPr>
+        <p:style>
+          <a:lnRef idx="1">
+            <a:schemeClr val="accent1"/>
+          </a:lnRef>
+          <a:fillRef idx="3">
+            <a:schemeClr val="accent1"/>
+          </a:fillRef>
+          <a:effectRef idx="2">
+            <a:schemeClr val="accent1"/>
+          </a:effectRef>
+          <a:fontRef idx="minor">
+            <a:schemeClr val="lt1"/>
+          </a:fontRef>
+        </p:style>
+        <p:txBody>
+          <a:bodyPr rtlCol="0" anchor="ctr"/>
+          <a:lstStyle/>
+          <a:p>
+            <a:pPr algn="ctr"/>
+          </a:p>
+        </p:txBody>
+      </p:sp>
+      <p:sp>
+        <p:nvSpPr>
+          <p:cNvPr id="67" name="Rounded Rectangle 66"/>
+          <p:cNvSpPr/>
+          <p:nvPr/>
+        </p:nvSpPr>
+        <p:spPr>
+          <a:xfrm>
+            <a:off x="7410297" y="5029200"/>
+            <a:ext cx="1945843" cy="1207008"/>
+          </a:xfrm>
+          <a:prstGeom prst="roundRect">
+            <a:avLst>
+              <a:gd name="adj" fmla="val 10000"/>
+            </a:avLst>
+          </a:prstGeom>
+          <a:solidFill>
+            <a:srgbClr val="F6F3EE"/>
+          </a:solidFill>
+          <a:ln w="15875">
+            <a:solidFill>
+              <a:srgbClr val="E8A338"/>
+            </a:solidFill>
+            <a:prstDash val="dash"/>
+          </a:ln>
+        </p:spPr>
+        <p:style>
+          <a:lnRef idx="1">
+            <a:schemeClr val="accent1"/>
+          </a:lnRef>
+          <a:fillRef idx="3">
+            <a:schemeClr val="accent1"/>
+          </a:fillRef>
+          <a:effectRef idx="2">
+            <a:schemeClr val="accent1"/>
+          </a:effectRef>
+          <a:fontRef idx="minor">
+            <a:schemeClr val="lt1"/>
+          </a:fontRef>
+        </p:style>
+        <p:txBody>
+          <a:bodyPr rtlCol="0" anchor="ctr"/>
+          <a:lstStyle/>
+          <a:p>
+            <a:pPr algn="ctr"/>
+          </a:p>
+        </p:txBody>
+      </p:sp>
+      <p:sp>
+        <p:nvSpPr>
+          <p:cNvPr id="68" name="TextBox 67"/>
+          <p:cNvSpPr txBox="1"/>
+          <p:nvPr/>
+        </p:nvSpPr>
+        <p:spPr>
+          <a:xfrm>
+            <a:off x="7483449" y="5230368"/>
+            <a:ext cx="1799539" cy="841248"/>
+          </a:xfrm>
+          <a:prstGeom prst="rect">
+            <a:avLst/>
+          </a:prstGeom>
+          <a:noFill/>
+        </p:spPr>
+        <p:txBody>
+          <a:bodyPr wrap="square">
+            <a:spAutoFit/>
+          </a:bodyPr>
+          <a:lstStyle/>
+          <a:p>
+            <a:pPr algn="ctr">
+              <a:spcAft>
+                <a:spcPts val="100"/>
+              </a:spcAft>
+            </a:pPr>
+            <a:r>
+              <a:rPr sz="1200" b="1">
+                <a:solidFill>
+                  <a:srgbClr val="5A6678"/>
+                </a:solidFill>
+                <a:latin typeface="Calibri"/>
+              </a:rPr>
+              <a:t>Camera</a:t>
+            </a:r>
+          </a:p>
+          <a:p>
+            <a:pPr algn="ctr">
+              <a:spcAft>
+                <a:spcPts val="100"/>
+              </a:spcAft>
+            </a:pPr>
+            <a:r>
+              <a:rPr sz="1200" b="1">
+                <a:solidFill>
+                  <a:srgbClr val="5A6678"/>
+                </a:solidFill>
+                <a:latin typeface="Calibri"/>
+              </a:rPr>
+              <a:t>coordinates (m)</a:t>
+            </a:r>
+          </a:p>
+        </p:txBody>
+      </p:sp>
+      <p:sp>
+        <p:nvSpPr>
+          <p:cNvPr id="69" name="Right Arrow 68"/>
+          <p:cNvSpPr/>
+          <p:nvPr/>
+        </p:nvSpPr>
+        <p:spPr>
+          <a:xfrm>
+            <a:off x="9411004" y="5541264"/>
+            <a:ext cx="256032" cy="182880"/>
+          </a:xfrm>
+          <a:prstGeom prst="rightArrow">
+            <a:avLst/>
+          </a:prstGeom>
+          <a:solidFill>
+            <a:srgbClr val="E8A338"/>
+          </a:solidFill>
+          <a:ln>
+            <a:noFill/>
+          </a:ln>
+        </p:spPr>
+        <p:style>
+          <a:lnRef idx="1">
+            <a:schemeClr val="accent1"/>
+          </a:lnRef>
+          <a:fillRef idx="3">
+            <a:schemeClr val="accent1"/>
+          </a:fillRef>
+          <a:effectRef idx="2">
+            <a:schemeClr val="accent1"/>
+          </a:effectRef>
+          <a:fontRef idx="minor">
+            <a:schemeClr val="lt1"/>
+          </a:fontRef>
+        </p:style>
+        <p:txBody>
+          <a:bodyPr rtlCol="0" anchor="ctr"/>
+          <a:lstStyle/>
+          <a:p>
+            <a:pPr algn="ctr"/>
+          </a:p>
+        </p:txBody>
+      </p:sp>
+      <p:sp>
+        <p:nvSpPr>
+          <p:cNvPr id="70" name="Rounded Rectangle 69"/>
+          <p:cNvSpPr/>
+          <p:nvPr/>
+        </p:nvSpPr>
+        <p:spPr>
+          <a:xfrm>
+            <a:off x="9703612" y="5029200"/>
+            <a:ext cx="1945843" cy="1207008"/>
+          </a:xfrm>
+          <a:prstGeom prst="roundRect">
+            <a:avLst>
+              <a:gd name="adj" fmla="val 10000"/>
+            </a:avLst>
+          </a:prstGeom>
+          <a:solidFill>
+            <a:srgbClr val="F6F3EE"/>
+          </a:solidFill>
+          <a:ln w="15875">
+            <a:solidFill>
+              <a:srgbClr val="E8A338"/>
+            </a:solidFill>
+            <a:prstDash val="dash"/>
+          </a:ln>
+        </p:spPr>
+        <p:style>
+          <a:lnRef idx="1">
+            <a:schemeClr val="accent1"/>
+          </a:lnRef>
+          <a:fillRef idx="3">
+            <a:schemeClr val="accent1"/>
+          </a:fillRef>
+          <a:effectRef idx="2">
+            <a:schemeClr val="accent1"/>
+          </a:effectRef>
+          <a:fontRef idx="minor">
+            <a:schemeClr val="lt1"/>
+          </a:fontRef>
+        </p:style>
+        <p:txBody>
+          <a:bodyPr rtlCol="0" anchor="ctr"/>
+          <a:lstStyle/>
+          <a:p>
+            <a:pPr algn="ctr"/>
+          </a:p>
+        </p:txBody>
+      </p:sp>
+      <p:sp>
+        <p:nvSpPr>
+          <p:cNvPr id="71" name="TextBox 70"/>
+          <p:cNvSpPr txBox="1"/>
+          <p:nvPr/>
+        </p:nvSpPr>
+        <p:spPr>
+          <a:xfrm>
+            <a:off x="9776764" y="5230368"/>
+            <a:ext cx="1799539" cy="841248"/>
+          </a:xfrm>
+          <a:prstGeom prst="rect">
+            <a:avLst/>
+          </a:prstGeom>
+          <a:noFill/>
+        </p:spPr>
+        <p:txBody>
+          <a:bodyPr wrap="square">
+            <a:spAutoFit/>
+          </a:bodyPr>
+          <a:lstStyle/>
+          <a:p>
+            <a:pPr algn="ctr">
+              <a:spcAft>
+                <a:spcPts val="100"/>
+              </a:spcAft>
+            </a:pPr>
+            <a:r>
+              <a:rPr sz="1200" b="1">
+                <a:solidFill>
+                  <a:srgbClr val="5A6678"/>
+                </a:solidFill>
+                <a:latin typeface="Calibri"/>
+              </a:rPr>
+              <a:t>3D motion</a:t>
+            </a:r>
+          </a:p>
+          <a:p>
+            <a:pPr algn="ctr">
+              <a:spcAft>
+                <a:spcPts val="100"/>
+              </a:spcAft>
+            </a:pPr>
+            <a:r>
+              <a:rPr sz="1200" b="1">
+                <a:solidFill>
+                  <a:srgbClr val="5A6678"/>
+                </a:solidFill>
+                <a:latin typeface="Calibri"/>
+              </a:rPr>
+              <a:t>/ speed</a:t>
+            </a:r>
+          </a:p>
+        </p:txBody>
+      </p:sp>
+      <p:sp>
+        <p:nvSpPr>
+          <p:cNvPr id="72" name="Rectangle 71"/>
+          <p:cNvSpPr/>
+          <p:nvPr/>
+        </p:nvSpPr>
+        <p:spPr>
+          <a:xfrm>
+            <a:off x="0" y="6510528"/>
+            <a:ext cx="12191695" cy="347472"/>
+          </a:xfrm>
+          <a:prstGeom prst="rect">
+            <a:avLst/>
+          </a:prstGeom>
+          <a:solidFill>
+            <a:srgbClr val="0B1F3A"/>
+          </a:solidFill>
+          <a:ln>
+            <a:noFill/>
+          </a:ln>
+        </p:spPr>
+        <p:style>
+          <a:lnRef idx="1">
+            <a:schemeClr val="accent1"/>
+          </a:lnRef>
+          <a:fillRef idx="3">
+            <a:schemeClr val="accent1"/>
+          </a:fillRef>
+          <a:effectRef idx="2">
+            <a:schemeClr val="accent1"/>
+          </a:effectRef>
+          <a:fontRef idx="minor">
+            <a:schemeClr val="lt1"/>
+          </a:fontRef>
+        </p:style>
+        <p:txBody>
+          <a:bodyPr rtlCol="0" anchor="ctr"/>
+          <a:lstStyle/>
+          <a:p>
+            <a:pPr algn="ctr"/>
+          </a:p>
+        </p:txBody>
+      </p:sp>
+      <p:sp>
+        <p:nvSpPr>
+          <p:cNvPr id="73" name="TextBox 72"/>
           <p:cNvSpPr txBox="1"/>
           <p:nvPr/>
         </p:nvSpPr>
@@ -5931,7 +7441,7 @@
                 </a:solidFill>
                 <a:latin typeface="Calibri"/>
               </a:rPr>
-              <a:t>Workflow is 2D camera pixels only. Depth is not used yet.</a:t>
+              <a:t>Current implementation: RGB-based 2D motion analysis     ·     Next phase: RealSense depth integration for true 3D coordinates</a:t>
             </a:r>
           </a:p>
         </p:txBody>
@@ -6006,7 +7516,7 @@
         <p:spPr>
           <a:xfrm>
             <a:off x="0" y="0"/>
-            <a:ext cx="12191695" cy="1572768"/>
+            <a:ext cx="12191695" cy="1353312"/>
           </a:xfrm>
           <a:prstGeom prst="rect">
             <a:avLst/>
@@ -6048,8 +7558,8 @@
         </p:nvSpPr>
         <p:spPr>
           <a:xfrm>
-            <a:off x="0" y="1572768"/>
-            <a:ext cx="12191695" cy="73152"/>
+            <a:off x="0" y="1353312"/>
+            <a:ext cx="12191695" cy="64008"/>
           </a:xfrm>
           <a:prstGeom prst="rect">
             <a:avLst/>
@@ -6091,8 +7601,8 @@
         </p:nvSpPr>
         <p:spPr>
           <a:xfrm>
-            <a:off x="457200" y="164592"/>
-            <a:ext cx="11247120" cy="292608"/>
+            <a:off x="457200" y="109728"/>
+            <a:ext cx="11247120" cy="256032"/>
           </a:xfrm>
           <a:prstGeom prst="rect">
             <a:avLst/>
@@ -6112,7 +7622,7 @@
                 </a:solidFill>
                 <a:latin typeface="Calibri"/>
               </a:rPr>
-              <a:t>IMPLEMENTATION</a:t>
+              <a:t>SLIDE 3   ·   TECHNOLOGY STACK  &amp;  IMPLEMENTATION</a:t>
             </a:r>
           </a:p>
         </p:txBody>
@@ -6125,8 +7635,8 @@
         </p:nvSpPr>
         <p:spPr>
           <a:xfrm>
-            <a:off x="457200" y="438912"/>
-            <a:ext cx="11247120" cy="640080"/>
+            <a:off x="457200" y="347472"/>
+            <a:ext cx="11247120" cy="566928"/>
           </a:xfrm>
           <a:prstGeom prst="rect">
             <a:avLst/>
@@ -6140,13 +7650,13 @@
           <a:lstStyle/>
           <a:p>
             <a:r>
-              <a:rPr sz="3200" b="1">
+              <a:rPr sz="2600" b="1">
                 <a:solidFill>
                   <a:srgbClr val="FFFFFF"/>
                 </a:solidFill>
                 <a:latin typeface="Calibri"/>
               </a:rPr>
-              <a:t>Tech stack</a:t>
+              <a:t>Technology Stack &amp; System Architecture</a:t>
             </a:r>
           </a:p>
         </p:txBody>
@@ -6159,8 +7669,8 @@
         </p:nvSpPr>
         <p:spPr>
           <a:xfrm>
-            <a:off x="457200" y="1060704"/>
-            <a:ext cx="11247120" cy="365760"/>
+            <a:off x="457200" y="932688"/>
+            <a:ext cx="11247120" cy="329184"/>
           </a:xfrm>
           <a:prstGeom prst="rect">
             <a:avLst/>
@@ -6174,13 +7684,13 @@
           <a:lstStyle/>
           <a:p>
             <a:r>
-              <a:rPr sz="1500" b="0">
+              <a:rPr sz="1400" b="0">
                 <a:solidFill>
                   <a:srgbClr val="C5D4E8"/>
                 </a:solidFill>
                 <a:latin typeface="Calibri"/>
               </a:rPr>
-              <a:t>Python  ·  nothing hardcoded in code  ·  run from the project folder:  python app.py</a:t>
+              <a:t>Modular 2D pipeline   ·   hardware, vision, app, data   ·   ready for depth later</a:t>
             </a:r>
           </a:p>
         </p:txBody>
@@ -6193,8 +7703,8 @@
         </p:nvSpPr>
         <p:spPr>
           <a:xfrm>
-            <a:off x="411480" y="1847088"/>
-            <a:ext cx="3703320" cy="1874519"/>
+            <a:off x="347472" y="1536192"/>
+            <a:ext cx="7571231" cy="749808"/>
           </a:xfrm>
           <a:prstGeom prst="roundRect">
             <a:avLst>
@@ -6240,8 +7750,8 @@
         </p:nvSpPr>
         <p:spPr>
           <a:xfrm>
-            <a:off x="411480" y="1847088"/>
-            <a:ext cx="3703320" cy="82296"/>
+            <a:off x="347472" y="1536192"/>
+            <a:ext cx="91440" cy="749808"/>
           </a:xfrm>
           <a:prstGeom prst="rect">
             <a:avLst/>
@@ -6283,8 +7793,8 @@
         </p:nvSpPr>
         <p:spPr>
           <a:xfrm>
-            <a:off x="594360" y="2029968"/>
-            <a:ext cx="3337560" cy="256032"/>
+            <a:off x="585216" y="1609344"/>
+            <a:ext cx="7205471" cy="256032"/>
           </a:xfrm>
           <a:prstGeom prst="rect">
             <a:avLst/>
@@ -6298,13 +7808,13 @@
           <a:lstStyle/>
           <a:p>
             <a:r>
-              <a:rPr sz="1100" b="1">
+              <a:rPr sz="1200" b="1">
                 <a:solidFill>
                   <a:srgbClr val="1FB5A6"/>
                 </a:solidFill>
                 <a:latin typeface="Calibri"/>
               </a:rPr>
-              <a:t>CAMERA</a:t>
+              <a:t>HARDWARE</a:t>
             </a:r>
           </a:p>
         </p:txBody>
@@ -6317,8 +7827,8 @@
         </p:nvSpPr>
         <p:spPr>
           <a:xfrm>
-            <a:off x="594360" y="2286000"/>
-            <a:ext cx="3337560" cy="347472"/>
+            <a:off x="585216" y="1865376"/>
+            <a:ext cx="7168895" cy="347471"/>
           </a:xfrm>
           <a:prstGeom prst="rect">
             <a:avLst/>
@@ -6326,13 +7836,18 @@
           <a:noFill/>
         </p:spPr>
         <p:txBody>
-          <a:bodyPr wrap="none">
+          <a:bodyPr wrap="square">
             <a:spAutoFit/>
           </a:bodyPr>
           <a:lstStyle/>
           <a:p>
-            <a:r>
-              <a:rPr sz="1600" b="1">
+            <a:pPr>
+              <a:spcAft>
+                <a:spcPts val="300"/>
+              </a:spcAft>
+            </a:pPr>
+            <a:r>
+              <a:rPr sz="1300" b="1">
                 <a:solidFill>
                   <a:srgbClr val="1A2332"/>
                 </a:solidFill>
@@ -6340,74 +7855,28 @@
               </a:rPr>
               <a:t>Intel RealSense D455f</a:t>
             </a:r>
-          </a:p>
-        </p:txBody>
-      </p:sp>
-      <p:sp>
-        <p:nvSpPr>
-          <p:cNvPr id="12" name="TextBox 11"/>
-          <p:cNvSpPr txBox="1"/>
-          <p:nvPr/>
-        </p:nvSpPr>
-        <p:spPr>
-          <a:xfrm>
-            <a:off x="594360" y="2688336"/>
-            <a:ext cx="3337560" cy="868680"/>
-          </a:xfrm>
-          <a:prstGeom prst="rect">
-            <a:avLst/>
-          </a:prstGeom>
-          <a:noFill/>
-        </p:spPr>
-        <p:txBody>
-          <a:bodyPr wrap="square">
-            <a:spAutoFit/>
-          </a:bodyPr>
-          <a:lstStyle/>
-          <a:p>
-            <a:pPr>
-              <a:spcAft>
-                <a:spcPts val="200"/>
-              </a:spcAft>
-            </a:pPr>
-            <a:r>
-              <a:rPr sz="1300" b="0">
+            <a:r>
+              <a:rPr sz="1200" b="0">
                 <a:solidFill>
                   <a:srgbClr val="5A6678"/>
                 </a:solidFill>
                 <a:latin typeface="Calibri"/>
               </a:rPr>
-              <a:t>pyrealsense2  ·  live RGB</a:t>
-            </a:r>
-          </a:p>
-          <a:p>
-            <a:pPr>
-              <a:spcAft>
-                <a:spcPts val="200"/>
-              </a:spcAft>
-            </a:pPr>
-            <a:r>
-              <a:rPr sz="1300" b="0">
-                <a:solidFill>
-                  <a:srgbClr val="5A6678"/>
-                </a:solidFill>
-                <a:latin typeface="Calibri"/>
-              </a:rPr>
-              <a:t>.bag playback for later 3D</a:t>
-            </a:r>
-          </a:p>
-        </p:txBody>
-      </p:sp>
-      <p:sp>
-        <p:nvSpPr>
-          <p:cNvPr id="13" name="Rounded Rectangle 12"/>
+              <a:t>    RGB-D camera  ·  USB 3.0  ·  future depth integration</a:t>
+            </a:r>
+          </a:p>
+        </p:txBody>
+      </p:sp>
+      <p:sp>
+        <p:nvSpPr>
+          <p:cNvPr id="12" name="Rounded Rectangle 11"/>
           <p:cNvSpPr/>
           <p:nvPr/>
         </p:nvSpPr>
         <p:spPr>
           <a:xfrm>
-            <a:off x="4315968" y="1847088"/>
-            <a:ext cx="3703320" cy="1874519"/>
+            <a:off x="347472" y="2377439"/>
+            <a:ext cx="7571231" cy="1024128"/>
           </a:xfrm>
           <a:prstGeom prst="roundRect">
             <a:avLst>
@@ -6447,20 +7916,20 @@
       </p:sp>
       <p:sp>
         <p:nvSpPr>
-          <p:cNvPr id="14" name="Rectangle 13"/>
+          <p:cNvPr id="13" name="Rectangle 12"/>
           <p:cNvSpPr/>
           <p:nvPr/>
         </p:nvSpPr>
         <p:spPr>
           <a:xfrm>
-            <a:off x="4315968" y="1847088"/>
-            <a:ext cx="3703320" cy="82296"/>
-          </a:xfrm>
-          <a:prstGeom prst="rect">
-            <a:avLst/>
-          </a:prstGeom>
-          <a:solidFill>
-            <a:srgbClr val="143258"/>
+            <a:off x="347472" y="2377439"/>
+            <a:ext cx="91440" cy="1024128"/>
+          </a:xfrm>
+          <a:prstGeom prst="rect">
+            <a:avLst/>
+          </a:prstGeom>
+          <a:solidFill>
+            <a:srgbClr val="E8A338"/>
           </a:solidFill>
           <a:ln>
             <a:noFill/>
@@ -6490,14 +7959,14 @@
       </p:sp>
       <p:sp>
         <p:nvSpPr>
-          <p:cNvPr id="15" name="TextBox 14"/>
+          <p:cNvPr id="14" name="TextBox 13"/>
           <p:cNvSpPr txBox="1"/>
           <p:nvPr/>
         </p:nvSpPr>
         <p:spPr>
           <a:xfrm>
-            <a:off x="4498848" y="2029968"/>
-            <a:ext cx="3337560" cy="256032"/>
+            <a:off x="585216" y="2450591"/>
+            <a:ext cx="7205471" cy="256032"/>
           </a:xfrm>
           <a:prstGeom prst="rect">
             <a:avLst/>
@@ -6511,27 +7980,27 @@
           <a:lstStyle/>
           <a:p>
             <a:r>
-              <a:rPr sz="1100" b="1">
-                <a:solidFill>
-                  <a:srgbClr val="143258"/>
+              <a:rPr sz="1200" b="1">
+                <a:solidFill>
+                  <a:srgbClr val="E8A338"/>
                 </a:solidFill>
                 <a:latin typeface="Calibri"/>
               </a:rPr>
-              <a:t>VIDEO</a:t>
-            </a:r>
-          </a:p>
-        </p:txBody>
-      </p:sp>
-      <p:sp>
-        <p:nvSpPr>
-          <p:cNvPr id="16" name="TextBox 15"/>
+              <a:t>COMPUTER VISION  &amp;  AI</a:t>
+            </a:r>
+          </a:p>
+        </p:txBody>
+      </p:sp>
+      <p:sp>
+        <p:nvSpPr>
+          <p:cNvPr id="15" name="TextBox 14"/>
           <p:cNvSpPr txBox="1"/>
           <p:nvPr/>
         </p:nvSpPr>
         <p:spPr>
           <a:xfrm>
-            <a:off x="4498848" y="2286000"/>
-            <a:ext cx="3337560" cy="347472"/>
+            <a:off x="585216" y="2706623"/>
+            <a:ext cx="7168895" cy="621792"/>
           </a:xfrm>
           <a:prstGeom prst="rect">
             <a:avLst/>
@@ -6539,13 +8008,43 @@
           <a:noFill/>
         </p:spPr>
         <p:txBody>
-          <a:bodyPr wrap="none">
+          <a:bodyPr wrap="square">
             <a:spAutoFit/>
           </a:bodyPr>
           <a:lstStyle/>
           <a:p>
-            <a:r>
-              <a:rPr sz="1600" b="1">
+            <a:pPr>
+              <a:spcAft>
+                <a:spcPts val="300"/>
+              </a:spcAft>
+            </a:pPr>
+            <a:r>
+              <a:rPr sz="1300" b="1">
+                <a:solidFill>
+                  <a:srgbClr val="1A2332"/>
+                </a:solidFill>
+                <a:latin typeface="Calibri"/>
+              </a:rPr>
+              <a:t>MediaPipe Pose</a:t>
+            </a:r>
+            <a:r>
+              <a:rPr sz="1200" b="0">
+                <a:solidFill>
+                  <a:srgbClr val="5A6678"/>
+                </a:solidFill>
+                <a:latin typeface="Calibri"/>
+              </a:rPr>
+              <a:t>    33 body landmarks  ·  real-time pose estimation</a:t>
+            </a:r>
+          </a:p>
+          <a:p>
+            <a:pPr>
+              <a:spcAft>
+                <a:spcPts val="300"/>
+              </a:spcAft>
+            </a:pPr>
+            <a:r>
+              <a:rPr sz="1300" b="1">
                 <a:solidFill>
                   <a:srgbClr val="1A2332"/>
                 </a:solidFill>
@@ -6553,74 +8052,28 @@
               </a:rPr>
               <a:t>OpenCV</a:t>
             </a:r>
-          </a:p>
-        </p:txBody>
-      </p:sp>
-      <p:sp>
-        <p:nvSpPr>
-          <p:cNvPr id="17" name="TextBox 16"/>
-          <p:cNvSpPr txBox="1"/>
-          <p:nvPr/>
-        </p:nvSpPr>
-        <p:spPr>
-          <a:xfrm>
-            <a:off x="4498848" y="2688336"/>
-            <a:ext cx="3337560" cy="868680"/>
-          </a:xfrm>
-          <a:prstGeom prst="rect">
-            <a:avLst/>
-          </a:prstGeom>
-          <a:noFill/>
-        </p:spPr>
-        <p:txBody>
-          <a:bodyPr wrap="square">
-            <a:spAutoFit/>
-          </a:bodyPr>
-          <a:lstStyle/>
-          <a:p>
-            <a:pPr>
-              <a:spcAft>
-                <a:spcPts val="200"/>
-              </a:spcAft>
-            </a:pPr>
-            <a:r>
-              <a:rPr sz="1300" b="0">
+            <a:r>
+              <a:rPr sz="1200" b="0">
                 <a:solidFill>
                   <a:srgbClr val="5A6678"/>
                 </a:solidFill>
                 <a:latin typeface="Calibri"/>
               </a:rPr>
-              <a:t>Uploaded .mp4 / .avi</a:t>
-            </a:r>
-          </a:p>
-          <a:p>
-            <a:pPr>
-              <a:spcAft>
-                <a:spcPts val="200"/>
-              </a:spcAft>
-            </a:pPr>
-            <a:r>
-              <a:rPr sz="1300" b="0">
-                <a:solidFill>
-                  <a:srgbClr val="5A6678"/>
-                </a:solidFill>
-                <a:latin typeface="Calibri"/>
-              </a:rPr>
-              <a:t>Skeleton overlay on RGB</a:t>
-            </a:r>
-          </a:p>
-        </p:txBody>
-      </p:sp>
-      <p:sp>
-        <p:nvSpPr>
-          <p:cNvPr id="18" name="Rounded Rectangle 17"/>
+              <a:t>    Frame processing  ·  video I/O  ·  overlay generation</a:t>
+            </a:r>
+          </a:p>
+        </p:txBody>
+      </p:sp>
+      <p:sp>
+        <p:nvSpPr>
+          <p:cNvPr id="16" name="Rounded Rectangle 15"/>
           <p:cNvSpPr/>
           <p:nvPr/>
         </p:nvSpPr>
         <p:spPr>
           <a:xfrm>
-            <a:off x="8220456" y="1847088"/>
-            <a:ext cx="3703320" cy="1874519"/>
+            <a:off x="347472" y="3493008"/>
+            <a:ext cx="7571231" cy="1298448"/>
           </a:xfrm>
           <a:prstGeom prst="roundRect">
             <a:avLst>
@@ -6660,20 +8113,20 @@
       </p:sp>
       <p:sp>
         <p:nvSpPr>
-          <p:cNvPr id="19" name="Rectangle 18"/>
+          <p:cNvPr id="17" name="Rectangle 16"/>
           <p:cNvSpPr/>
           <p:nvPr/>
         </p:nvSpPr>
         <p:spPr>
           <a:xfrm>
-            <a:off x="8220456" y="1847088"/>
-            <a:ext cx="3703320" cy="82296"/>
-          </a:xfrm>
-          <a:prstGeom prst="rect">
-            <a:avLst/>
-          </a:prstGeom>
-          <a:solidFill>
-            <a:srgbClr val="E8A338"/>
+            <a:off x="347472" y="3493008"/>
+            <a:ext cx="91440" cy="1298448"/>
+          </a:xfrm>
+          <a:prstGeom prst="rect">
+            <a:avLst/>
+          </a:prstGeom>
+          <a:solidFill>
+            <a:srgbClr val="E06C5C"/>
           </a:solidFill>
           <a:ln>
             <a:noFill/>
@@ -6703,14 +8156,14 @@
       </p:sp>
       <p:sp>
         <p:nvSpPr>
-          <p:cNvPr id="20" name="TextBox 19"/>
+          <p:cNvPr id="18" name="TextBox 17"/>
           <p:cNvSpPr txBox="1"/>
           <p:nvPr/>
         </p:nvSpPr>
         <p:spPr>
           <a:xfrm>
-            <a:off x="8403336" y="2029968"/>
-            <a:ext cx="3337560" cy="256032"/>
+            <a:off x="585216" y="3566160"/>
+            <a:ext cx="7205471" cy="256032"/>
           </a:xfrm>
           <a:prstGeom prst="rect">
             <a:avLst/>
@@ -6724,61 +8177,27 @@
           <a:lstStyle/>
           <a:p>
             <a:r>
-              <a:rPr sz="1100" b="1">
-                <a:solidFill>
-                  <a:srgbClr val="E8A338"/>
+              <a:rPr sz="1200" b="1">
+                <a:solidFill>
+                  <a:srgbClr val="E06C5C"/>
                 </a:solidFill>
                 <a:latin typeface="Calibri"/>
               </a:rPr>
-              <a:t>POSE</a:t>
-            </a:r>
-          </a:p>
-        </p:txBody>
-      </p:sp>
-      <p:sp>
-        <p:nvSpPr>
-          <p:cNvPr id="21" name="TextBox 20"/>
+              <a:t>APPLICATION DEVELOPMENT</a:t>
+            </a:r>
+          </a:p>
+        </p:txBody>
+      </p:sp>
+      <p:sp>
+        <p:nvSpPr>
+          <p:cNvPr id="19" name="TextBox 18"/>
           <p:cNvSpPr txBox="1"/>
           <p:nvPr/>
         </p:nvSpPr>
         <p:spPr>
           <a:xfrm>
-            <a:off x="8403336" y="2286000"/>
-            <a:ext cx="3337560" cy="347472"/>
-          </a:xfrm>
-          <a:prstGeom prst="rect">
-            <a:avLst/>
-          </a:prstGeom>
-          <a:noFill/>
-        </p:spPr>
-        <p:txBody>
-          <a:bodyPr wrap="none">
-            <a:spAutoFit/>
-          </a:bodyPr>
-          <a:lstStyle/>
-          <a:p>
-            <a:r>
-              <a:rPr sz="1600" b="1">
-                <a:solidFill>
-                  <a:srgbClr val="1A2332"/>
-                </a:solidFill>
-                <a:latin typeface="Calibri"/>
-              </a:rPr>
-              <a:t>MediaPipe Pose</a:t>
-            </a:r>
-          </a:p>
-        </p:txBody>
-      </p:sp>
-      <p:sp>
-        <p:nvSpPr>
-          <p:cNvPr id="22" name="TextBox 21"/>
-          <p:cNvSpPr txBox="1"/>
-          <p:nvPr/>
-        </p:nvSpPr>
-        <p:spPr>
-          <a:xfrm>
-            <a:off x="8403336" y="2688336"/>
-            <a:ext cx="3337560" cy="868680"/>
+            <a:off x="585216" y="3822192"/>
+            <a:ext cx="7168895" cy="896112"/>
           </a:xfrm>
           <a:prstGeom prst="rect">
             <a:avLst/>
@@ -6793,47 +8212,90 @@
           <a:p>
             <a:pPr>
               <a:spcAft>
-                <a:spcPts val="200"/>
+                <a:spcPts val="300"/>
               </a:spcAft>
             </a:pPr>
             <a:r>
-              <a:rPr sz="1300" b="0">
-                <a:solidFill>
-                  <a:srgbClr val="5A6678"/>
+              <a:rPr sz="1300" b="1">
+                <a:solidFill>
+                  <a:srgbClr val="1A2332"/>
                 </a:solidFill>
                 <a:latin typeface="Calibri"/>
               </a:rPr>
-              <a:t>BlazePose  ·  33 landmarks</a:t>
+              <a:t>Python</a:t>
+            </a:r>
+            <a:r>
+              <a:rPr sz="1200" b="0">
+                <a:solidFill>
+                  <a:srgbClr val="5A6678"/>
+                </a:solidFill>
+                <a:latin typeface="Calibri"/>
+              </a:rPr>
+              <a:t>    Core processing pipeline</a:t>
             </a:r>
           </a:p>
           <a:p>
             <a:pPr>
               <a:spcAft>
-                <a:spcPts val="200"/>
+                <a:spcPts val="300"/>
               </a:spcAft>
             </a:pPr>
             <a:r>
-              <a:rPr sz="1300" b="0">
-                <a:solidFill>
-                  <a:srgbClr val="5A6678"/>
+              <a:rPr sz="1300" b="1">
+                <a:solidFill>
+                  <a:srgbClr val="1A2332"/>
                 </a:solidFill>
                 <a:latin typeface="Calibri"/>
               </a:rPr>
-              <a:t>2D pixels (u, v) only</a:t>
-            </a:r>
-          </a:p>
-        </p:txBody>
-      </p:sp>
-      <p:sp>
-        <p:nvSpPr>
-          <p:cNvPr id="23" name="Rounded Rectangle 22"/>
+              <a:t>Tkinter</a:t>
+            </a:r>
+            <a:r>
+              <a:rPr sz="1200" b="0">
+                <a:solidFill>
+                  <a:srgbClr val="5A6678"/>
+                </a:solidFill>
+                <a:latin typeface="Calibri"/>
+              </a:rPr>
+              <a:t>    Live UI  ·  camera / file  ·  session control</a:t>
+            </a:r>
+          </a:p>
+          <a:p>
+            <a:pPr>
+              <a:spcAft>
+                <a:spcPts val="300"/>
+              </a:spcAft>
+            </a:pPr>
+            <a:r>
+              <a:rPr sz="1300" b="1">
+                <a:solidFill>
+                  <a:srgbClr val="1A2332"/>
+                </a:solidFill>
+                <a:latin typeface="Calibri"/>
+              </a:rPr>
+              <a:t>Matplotlib</a:t>
+            </a:r>
+            <a:r>
+              <a:rPr sz="1200" b="0">
+                <a:solidFill>
+                  <a:srgbClr val="5A6678"/>
+                </a:solidFill>
+                <a:latin typeface="Calibri"/>
+              </a:rPr>
+              <a:t>    Post-session graphs  ·  angle / time  ·  statistics</a:t>
+            </a:r>
+          </a:p>
+        </p:txBody>
+      </p:sp>
+      <p:sp>
+        <p:nvSpPr>
+          <p:cNvPr id="20" name="Rounded Rectangle 19"/>
           <p:cNvSpPr/>
           <p:nvPr/>
         </p:nvSpPr>
         <p:spPr>
           <a:xfrm>
-            <a:off x="411480" y="3886199"/>
-            <a:ext cx="3703320" cy="1874519"/>
+            <a:off x="347472" y="4882896"/>
+            <a:ext cx="7571231" cy="1024128"/>
           </a:xfrm>
           <a:prstGeom prst="roundRect">
             <a:avLst>
@@ -6873,20 +8335,20 @@
       </p:sp>
       <p:sp>
         <p:nvSpPr>
-          <p:cNvPr id="24" name="Rectangle 23"/>
+          <p:cNvPr id="21" name="Rectangle 20"/>
           <p:cNvSpPr/>
           <p:nvPr/>
         </p:nvSpPr>
         <p:spPr>
           <a:xfrm>
-            <a:off x="411480" y="3886199"/>
-            <a:ext cx="3703320" cy="82296"/>
-          </a:xfrm>
-          <a:prstGeom prst="rect">
-            <a:avLst/>
-          </a:prstGeom>
-          <a:solidFill>
-            <a:srgbClr val="E06C5C"/>
+            <a:off x="347472" y="4882896"/>
+            <a:ext cx="91440" cy="1024128"/>
+          </a:xfrm>
+          <a:prstGeom prst="rect">
+            <a:avLst/>
+          </a:prstGeom>
+          <a:solidFill>
+            <a:srgbClr val="143258"/>
           </a:solidFill>
           <a:ln>
             <a:noFill/>
@@ -6916,14 +8378,14 @@
       </p:sp>
       <p:sp>
         <p:nvSpPr>
-          <p:cNvPr id="25" name="TextBox 24"/>
+          <p:cNvPr id="22" name="TextBox 21"/>
           <p:cNvSpPr txBox="1"/>
           <p:nvPr/>
         </p:nvSpPr>
         <p:spPr>
           <a:xfrm>
-            <a:off x="594360" y="4069079"/>
-            <a:ext cx="3337560" cy="256032"/>
+            <a:off x="585216" y="4956048"/>
+            <a:ext cx="7205471" cy="256032"/>
           </a:xfrm>
           <a:prstGeom prst="rect">
             <a:avLst/>
@@ -6937,61 +8399,27 @@
           <a:lstStyle/>
           <a:p>
             <a:r>
-              <a:rPr sz="1100" b="1">
-                <a:solidFill>
-                  <a:srgbClr val="E06C5C"/>
+              <a:rPr sz="1200" b="1">
+                <a:solidFill>
+                  <a:srgbClr val="143258"/>
                 </a:solidFill>
                 <a:latin typeface="Calibri"/>
               </a:rPr>
-              <a:t>CONFIG</a:t>
-            </a:r>
-          </a:p>
-        </p:txBody>
-      </p:sp>
-      <p:sp>
-        <p:nvSpPr>
-          <p:cNvPr id="26" name="TextBox 25"/>
+              <a:t>CONFIGURATION  &amp;  DATA</a:t>
+            </a:r>
+          </a:p>
+        </p:txBody>
+      </p:sp>
+      <p:sp>
+        <p:nvSpPr>
+          <p:cNvPr id="23" name="TextBox 22"/>
           <p:cNvSpPr txBox="1"/>
           <p:nvPr/>
         </p:nvSpPr>
         <p:spPr>
           <a:xfrm>
-            <a:off x="594360" y="4325111"/>
-            <a:ext cx="3337560" cy="347472"/>
-          </a:xfrm>
-          <a:prstGeom prst="rect">
-            <a:avLst/>
-          </a:prstGeom>
-          <a:noFill/>
-        </p:spPr>
-        <p:txBody>
-          <a:bodyPr wrap="none">
-            <a:spAutoFit/>
-          </a:bodyPr>
-          <a:lstStyle/>
-          <a:p>
-            <a:r>
-              <a:rPr sz="1600" b="1">
-                <a:solidFill>
-                  <a:srgbClr val="1A2332"/>
-                </a:solidFill>
-                <a:latin typeface="Calibri"/>
-              </a:rPr>
-              <a:t>YAML  ·  config.yaml</a:t>
-            </a:r>
-          </a:p>
-        </p:txBody>
-      </p:sp>
-      <p:sp>
-        <p:nvSpPr>
-          <p:cNvPr id="27" name="TextBox 26"/>
-          <p:cNvSpPr txBox="1"/>
-          <p:nvPr/>
-        </p:nvSpPr>
-        <p:spPr>
-          <a:xfrm>
-            <a:off x="594360" y="4727447"/>
-            <a:ext cx="3337560" cy="868680"/>
+            <a:off x="585216" y="5212080"/>
+            <a:ext cx="7168895" cy="621792"/>
           </a:xfrm>
           <a:prstGeom prst="rect">
             <a:avLst/>
@@ -7006,47 +8434,65 @@
           <a:p>
             <a:pPr>
               <a:spcAft>
-                <a:spcPts val="200"/>
+                <a:spcPts val="300"/>
               </a:spcAft>
             </a:pPr>
             <a:r>
-              <a:rPr sz="1300" b="0">
-                <a:solidFill>
-                  <a:srgbClr val="5A6678"/>
+              <a:rPr sz="1300" b="1">
+                <a:solidFill>
+                  <a:srgbClr val="1A2332"/>
                 </a:solidFill>
                 <a:latin typeface="Calibri"/>
               </a:rPr>
-              <a:t>Resolution, FPS, thresholds</a:t>
+              <a:t>YAML</a:t>
+            </a:r>
+            <a:r>
+              <a:rPr sz="1200" b="0">
+                <a:solidFill>
+                  <a:srgbClr val="5A6678"/>
+                </a:solidFill>
+                <a:latin typeface="Calibri"/>
+              </a:rPr>
+              <a:t>    Central config — camera, pose, analysis, output</a:t>
             </a:r>
           </a:p>
           <a:p>
             <a:pPr>
               <a:spcAft>
-                <a:spcPts val="200"/>
+                <a:spcPts val="300"/>
               </a:spcAft>
             </a:pPr>
             <a:r>
-              <a:rPr sz="1300" b="0">
-                <a:solidFill>
-                  <a:srgbClr val="5A6678"/>
+              <a:rPr sz="1300" b="1">
+                <a:solidFill>
+                  <a:srgbClr val="1A2332"/>
                 </a:solidFill>
                 <a:latin typeface="Calibri"/>
               </a:rPr>
-              <a:t>Which joints and trail</a:t>
-            </a:r>
-          </a:p>
-        </p:txBody>
-      </p:sp>
-      <p:sp>
-        <p:nvSpPr>
-          <p:cNvPr id="28" name="Rounded Rectangle 27"/>
+              <a:t>CSV / JSON / MP4</a:t>
+            </a:r>
+            <a:r>
+              <a:rPr sz="1200" b="0">
+                <a:solidFill>
+                  <a:srgbClr val="5A6678"/>
+                </a:solidFill>
+                <a:latin typeface="Calibri"/>
+              </a:rPr>
+              <a:t>    Motion data  ·  run metadata  ·  annotated video</a:t>
+            </a:r>
+          </a:p>
+        </p:txBody>
+      </p:sp>
+      <p:sp>
+        <p:nvSpPr>
+          <p:cNvPr id="24" name="Rounded Rectangle 23"/>
           <p:cNvSpPr/>
           <p:nvPr/>
         </p:nvSpPr>
         <p:spPr>
           <a:xfrm>
-            <a:off x="4315968" y="3886199"/>
-            <a:ext cx="3703320" cy="1874519"/>
+            <a:off x="8083296" y="1536192"/>
+            <a:ext cx="3749039" cy="4370832"/>
           </a:xfrm>
           <a:prstGeom prst="roundRect">
             <a:avLst>
@@ -7054,7 +8500,7 @@
             </a:avLst>
           </a:prstGeom>
           <a:solidFill>
-            <a:srgbClr val="FFFFFF"/>
+            <a:srgbClr val="0B1F3A"/>
           </a:solidFill>
           <a:ln w="12700">
             <a:solidFill>
@@ -7086,20 +8532,57 @@
       </p:sp>
       <p:sp>
         <p:nvSpPr>
-          <p:cNvPr id="29" name="Rectangle 28"/>
+          <p:cNvPr id="25" name="TextBox 24"/>
+          <p:cNvSpPr txBox="1"/>
+          <p:nvPr/>
+        </p:nvSpPr>
+        <p:spPr>
+          <a:xfrm>
+            <a:off x="8193023" y="1627632"/>
+            <a:ext cx="3529583" cy="237744"/>
+          </a:xfrm>
+          <a:prstGeom prst="rect">
+            <a:avLst/>
+          </a:prstGeom>
+          <a:noFill/>
+        </p:spPr>
+        <p:txBody>
+          <a:bodyPr wrap="square">
+            <a:spAutoFit/>
+          </a:bodyPr>
+          <a:lstStyle/>
+          <a:p>
+            <a:pPr algn="ctr"/>
+            <a:r>
+              <a:rPr sz="1100" b="1">
+                <a:solidFill>
+                  <a:srgbClr val="1FB5A6"/>
+                </a:solidFill>
+                <a:latin typeface="Calibri"/>
+              </a:rPr>
+              <a:t>ARCHITECTURE</a:t>
+            </a:r>
+          </a:p>
+        </p:txBody>
+      </p:sp>
+      <p:sp>
+        <p:nvSpPr>
+          <p:cNvPr id="26" name="Rounded Rectangle 25"/>
           <p:cNvSpPr/>
           <p:nvPr/>
         </p:nvSpPr>
         <p:spPr>
           <a:xfrm>
-            <a:off x="4315968" y="3886199"/>
-            <a:ext cx="3703320" cy="82296"/>
-          </a:xfrm>
-          <a:prstGeom prst="rect">
-            <a:avLst/>
-          </a:prstGeom>
-          <a:solidFill>
-            <a:srgbClr val="1FB5A6"/>
+            <a:off x="8266175" y="1938528"/>
+            <a:ext cx="3383279" cy="438912"/>
+          </a:xfrm>
+          <a:prstGeom prst="roundRect">
+            <a:avLst>
+              <a:gd name="adj" fmla="val 12000"/>
+            </a:avLst>
+          </a:prstGeom>
+          <a:solidFill>
+            <a:srgbClr val="FFFFFF"/>
           </a:solidFill>
           <a:ln>
             <a:noFill/>
@@ -7129,82 +8612,14 @@
       </p:sp>
       <p:sp>
         <p:nvSpPr>
-          <p:cNvPr id="30" name="TextBox 29"/>
+          <p:cNvPr id="27" name="TextBox 26"/>
           <p:cNvSpPr txBox="1"/>
           <p:nvPr/>
         </p:nvSpPr>
         <p:spPr>
           <a:xfrm>
-            <a:off x="4498848" y="4069079"/>
-            <a:ext cx="3337560" cy="256032"/>
-          </a:xfrm>
-          <a:prstGeom prst="rect">
-            <a:avLst/>
-          </a:prstGeom>
-          <a:noFill/>
-        </p:spPr>
-        <p:txBody>
-          <a:bodyPr wrap="none">
-            <a:spAutoFit/>
-          </a:bodyPr>
-          <a:lstStyle/>
-          <a:p>
-            <a:r>
-              <a:rPr sz="1100" b="1">
-                <a:solidFill>
-                  <a:srgbClr val="1FB5A6"/>
-                </a:solidFill>
-                <a:latin typeface="Calibri"/>
-              </a:rPr>
-              <a:t>INTERFACE</a:t>
-            </a:r>
-          </a:p>
-        </p:txBody>
-      </p:sp>
-      <p:sp>
-        <p:nvSpPr>
-          <p:cNvPr id="31" name="TextBox 30"/>
-          <p:cNvSpPr txBox="1"/>
-          <p:nvPr/>
-        </p:nvSpPr>
-        <p:spPr>
-          <a:xfrm>
-            <a:off x="4498848" y="4325111"/>
-            <a:ext cx="3337560" cy="347472"/>
-          </a:xfrm>
-          <a:prstGeom prst="rect">
-            <a:avLst/>
-          </a:prstGeom>
-          <a:noFill/>
-        </p:spPr>
-        <p:txBody>
-          <a:bodyPr wrap="none">
-            <a:spAutoFit/>
-          </a:bodyPr>
-          <a:lstStyle/>
-          <a:p>
-            <a:r>
-              <a:rPr sz="1600" b="1">
-                <a:solidFill>
-                  <a:srgbClr val="1A2332"/>
-                </a:solidFill>
-                <a:latin typeface="Calibri"/>
-              </a:rPr>
-              <a:t>Tkinter + Pillow</a:t>
-            </a:r>
-          </a:p>
-        </p:txBody>
-      </p:sp>
-      <p:sp>
-        <p:nvSpPr>
-          <p:cNvPr id="32" name="TextBox 31"/>
-          <p:cNvSpPr txBox="1"/>
-          <p:nvPr/>
-        </p:nvSpPr>
-        <p:spPr>
-          <a:xfrm>
-            <a:off x="4498848" y="4727447"/>
-            <a:ext cx="3337560" cy="868680"/>
+            <a:off x="8339327" y="1975104"/>
+            <a:ext cx="3236975" cy="384048"/>
           </a:xfrm>
           <a:prstGeom prst="rect">
             <a:avLst/>
@@ -7217,49 +8632,856 @@
           </a:bodyPr>
           <a:lstStyle/>
           <a:p>
-            <a:pPr>
+            <a:pPr algn="ctr">
               <a:spcAft>
-                <a:spcPts val="200"/>
+                <a:spcPts val="0"/>
               </a:spcAft>
             </a:pPr>
             <a:r>
-              <a:rPr sz="1300" b="0">
-                <a:solidFill>
-                  <a:srgbClr val="5A6678"/>
+              <a:rPr sz="1100" b="1">
+                <a:solidFill>
+                  <a:srgbClr val="1A2332"/>
                 </a:solidFill>
                 <a:latin typeface="Calibri"/>
               </a:rPr>
-              <a:t>Live / Upload  ·  Start / Stop</a:t>
-            </a:r>
-          </a:p>
-          <a:p>
-            <a:pPr>
+              <a:t>RealSense  /  Video</a:t>
+            </a:r>
+          </a:p>
+        </p:txBody>
+      </p:sp>
+      <p:sp>
+        <p:nvSpPr>
+          <p:cNvPr id="28" name="Down Arrow 27"/>
+          <p:cNvSpPr/>
+          <p:nvPr/>
+        </p:nvSpPr>
+        <p:spPr>
+          <a:xfrm>
+            <a:off x="9857232" y="2386584"/>
+            <a:ext cx="201168" cy="128016"/>
+          </a:xfrm>
+          <a:prstGeom prst="downArrow">
+            <a:avLst/>
+          </a:prstGeom>
+          <a:solidFill>
+            <a:srgbClr val="1FB5A6"/>
+          </a:solidFill>
+          <a:ln>
+            <a:noFill/>
+          </a:ln>
+        </p:spPr>
+        <p:style>
+          <a:lnRef idx="1">
+            <a:schemeClr val="accent1"/>
+          </a:lnRef>
+          <a:fillRef idx="3">
+            <a:schemeClr val="accent1"/>
+          </a:fillRef>
+          <a:effectRef idx="2">
+            <a:schemeClr val="accent1"/>
+          </a:effectRef>
+          <a:fontRef idx="minor">
+            <a:schemeClr val="lt1"/>
+          </a:fontRef>
+        </p:style>
+        <p:txBody>
+          <a:bodyPr rtlCol="0" anchor="ctr"/>
+          <a:lstStyle/>
+          <a:p>
+            <a:pPr algn="ctr"/>
+          </a:p>
+        </p:txBody>
+      </p:sp>
+      <p:sp>
+        <p:nvSpPr>
+          <p:cNvPr id="29" name="Rounded Rectangle 28"/>
+          <p:cNvSpPr/>
+          <p:nvPr/>
+        </p:nvSpPr>
+        <p:spPr>
+          <a:xfrm>
+            <a:off x="8266175" y="2542032"/>
+            <a:ext cx="3383279" cy="438912"/>
+          </a:xfrm>
+          <a:prstGeom prst="roundRect">
+            <a:avLst>
+              <a:gd name="adj" fmla="val 12000"/>
+            </a:avLst>
+          </a:prstGeom>
+          <a:solidFill>
+            <a:srgbClr val="FFFFFF"/>
+          </a:solidFill>
+          <a:ln>
+            <a:noFill/>
+          </a:ln>
+        </p:spPr>
+        <p:style>
+          <a:lnRef idx="1">
+            <a:schemeClr val="accent1"/>
+          </a:lnRef>
+          <a:fillRef idx="3">
+            <a:schemeClr val="accent1"/>
+          </a:fillRef>
+          <a:effectRef idx="2">
+            <a:schemeClr val="accent1"/>
+          </a:effectRef>
+          <a:fontRef idx="minor">
+            <a:schemeClr val="lt1"/>
+          </a:fontRef>
+        </p:style>
+        <p:txBody>
+          <a:bodyPr rtlCol="0" anchor="ctr"/>
+          <a:lstStyle/>
+          <a:p>
+            <a:pPr algn="ctr"/>
+          </a:p>
+        </p:txBody>
+      </p:sp>
+      <p:sp>
+        <p:nvSpPr>
+          <p:cNvPr id="30" name="TextBox 29"/>
+          <p:cNvSpPr txBox="1"/>
+          <p:nvPr/>
+        </p:nvSpPr>
+        <p:spPr>
+          <a:xfrm>
+            <a:off x="8339327" y="2578608"/>
+            <a:ext cx="3236975" cy="384048"/>
+          </a:xfrm>
+          <a:prstGeom prst="rect">
+            <a:avLst/>
+          </a:prstGeom>
+          <a:noFill/>
+        </p:spPr>
+        <p:txBody>
+          <a:bodyPr wrap="square">
+            <a:spAutoFit/>
+          </a:bodyPr>
+          <a:lstStyle/>
+          <a:p>
+            <a:pPr algn="ctr">
               <a:spcAft>
-                <a:spcPts val="200"/>
+                <a:spcPts val="0"/>
               </a:spcAft>
             </a:pPr>
             <a:r>
-              <a:rPr sz="1300" b="0">
-                <a:solidFill>
-                  <a:srgbClr val="5A6678"/>
+              <a:rPr sz="1100" b="1">
+                <a:solidFill>
+                  <a:srgbClr val="1A2332"/>
                 </a:solidFill>
                 <a:latin typeface="Calibri"/>
               </a:rPr>
-              <a:t>Live elbow ° and wrist px/s</a:t>
-            </a:r>
-          </a:p>
-        </p:txBody>
-      </p:sp>
-      <p:sp>
-        <p:nvSpPr>
-          <p:cNvPr id="33" name="Rounded Rectangle 32"/>
+              <a:t>Capture layer</a:t>
+            </a:r>
+          </a:p>
+        </p:txBody>
+      </p:sp>
+      <p:sp>
+        <p:nvSpPr>
+          <p:cNvPr id="31" name="Down Arrow 30"/>
           <p:cNvSpPr/>
           <p:nvPr/>
         </p:nvSpPr>
         <p:spPr>
           <a:xfrm>
-            <a:off x="8220456" y="3886199"/>
-            <a:ext cx="3703320" cy="1874519"/>
+            <a:off x="9857232" y="2990088"/>
+            <a:ext cx="201168" cy="128016"/>
+          </a:xfrm>
+          <a:prstGeom prst="downArrow">
+            <a:avLst/>
+          </a:prstGeom>
+          <a:solidFill>
+            <a:srgbClr val="1FB5A6"/>
+          </a:solidFill>
+          <a:ln>
+            <a:noFill/>
+          </a:ln>
+        </p:spPr>
+        <p:style>
+          <a:lnRef idx="1">
+            <a:schemeClr val="accent1"/>
+          </a:lnRef>
+          <a:fillRef idx="3">
+            <a:schemeClr val="accent1"/>
+          </a:fillRef>
+          <a:effectRef idx="2">
+            <a:schemeClr val="accent1"/>
+          </a:effectRef>
+          <a:fontRef idx="minor">
+            <a:schemeClr val="lt1"/>
+          </a:fontRef>
+        </p:style>
+        <p:txBody>
+          <a:bodyPr rtlCol="0" anchor="ctr"/>
+          <a:lstStyle/>
+          <a:p>
+            <a:pPr algn="ctr"/>
+          </a:p>
+        </p:txBody>
+      </p:sp>
+      <p:sp>
+        <p:nvSpPr>
+          <p:cNvPr id="32" name="Rounded Rectangle 31"/>
+          <p:cNvSpPr/>
+          <p:nvPr/>
+        </p:nvSpPr>
+        <p:spPr>
+          <a:xfrm>
+            <a:off x="8266175" y="3145536"/>
+            <a:ext cx="3383279" cy="438912"/>
+          </a:xfrm>
+          <a:prstGeom prst="roundRect">
+            <a:avLst>
+              <a:gd name="adj" fmla="val 12000"/>
+            </a:avLst>
+          </a:prstGeom>
+          <a:solidFill>
+            <a:srgbClr val="FFFFFF"/>
+          </a:solidFill>
+          <a:ln>
+            <a:noFill/>
+          </a:ln>
+        </p:spPr>
+        <p:style>
+          <a:lnRef idx="1">
+            <a:schemeClr val="accent1"/>
+          </a:lnRef>
+          <a:fillRef idx="3">
+            <a:schemeClr val="accent1"/>
+          </a:fillRef>
+          <a:effectRef idx="2">
+            <a:schemeClr val="accent1"/>
+          </a:effectRef>
+          <a:fontRef idx="minor">
+            <a:schemeClr val="lt1"/>
+          </a:fontRef>
+        </p:style>
+        <p:txBody>
+          <a:bodyPr rtlCol="0" anchor="ctr"/>
+          <a:lstStyle/>
+          <a:p>
+            <a:pPr algn="ctr"/>
+          </a:p>
+        </p:txBody>
+      </p:sp>
+      <p:sp>
+        <p:nvSpPr>
+          <p:cNvPr id="33" name="TextBox 32"/>
+          <p:cNvSpPr txBox="1"/>
+          <p:nvPr/>
+        </p:nvSpPr>
+        <p:spPr>
+          <a:xfrm>
+            <a:off x="8339327" y="3182112"/>
+            <a:ext cx="3236975" cy="384048"/>
+          </a:xfrm>
+          <a:prstGeom prst="rect">
+            <a:avLst/>
+          </a:prstGeom>
+          <a:noFill/>
+        </p:spPr>
+        <p:txBody>
+          <a:bodyPr wrap="square">
+            <a:spAutoFit/>
+          </a:bodyPr>
+          <a:lstStyle/>
+          <a:p>
+            <a:pPr algn="ctr">
+              <a:spcAft>
+                <a:spcPts val="0"/>
+              </a:spcAft>
+            </a:pPr>
+            <a:r>
+              <a:rPr sz="1100" b="1">
+                <a:solidFill>
+                  <a:srgbClr val="1A2332"/>
+                </a:solidFill>
+                <a:latin typeface="Calibri"/>
+              </a:rPr>
+              <a:t>Pose estimation</a:t>
+            </a:r>
+          </a:p>
+          <a:p>
+            <a:pPr algn="ctr">
+              <a:spcAft>
+                <a:spcPts val="0"/>
+              </a:spcAft>
+            </a:pPr>
+            <a:r>
+              <a:rPr sz="1100" b="1">
+                <a:solidFill>
+                  <a:srgbClr val="1A2332"/>
+                </a:solidFill>
+                <a:latin typeface="Calibri"/>
+              </a:rPr>
+              <a:t>(MediaPipe)</a:t>
+            </a:r>
+          </a:p>
+        </p:txBody>
+      </p:sp>
+      <p:sp>
+        <p:nvSpPr>
+          <p:cNvPr id="34" name="Down Arrow 33"/>
+          <p:cNvSpPr/>
+          <p:nvPr/>
+        </p:nvSpPr>
+        <p:spPr>
+          <a:xfrm>
+            <a:off x="9857232" y="3593592"/>
+            <a:ext cx="201168" cy="128016"/>
+          </a:xfrm>
+          <a:prstGeom prst="downArrow">
+            <a:avLst/>
+          </a:prstGeom>
+          <a:solidFill>
+            <a:srgbClr val="1FB5A6"/>
+          </a:solidFill>
+          <a:ln>
+            <a:noFill/>
+          </a:ln>
+        </p:spPr>
+        <p:style>
+          <a:lnRef idx="1">
+            <a:schemeClr val="accent1"/>
+          </a:lnRef>
+          <a:fillRef idx="3">
+            <a:schemeClr val="accent1"/>
+          </a:fillRef>
+          <a:effectRef idx="2">
+            <a:schemeClr val="accent1"/>
+          </a:effectRef>
+          <a:fontRef idx="minor">
+            <a:schemeClr val="lt1"/>
+          </a:fontRef>
+        </p:style>
+        <p:txBody>
+          <a:bodyPr rtlCol="0" anchor="ctr"/>
+          <a:lstStyle/>
+          <a:p>
+            <a:pPr algn="ctr"/>
+          </a:p>
+        </p:txBody>
+      </p:sp>
+      <p:sp>
+        <p:nvSpPr>
+          <p:cNvPr id="35" name="Rounded Rectangle 34"/>
+          <p:cNvSpPr/>
+          <p:nvPr/>
+        </p:nvSpPr>
+        <p:spPr>
+          <a:xfrm>
+            <a:off x="8266175" y="3749040"/>
+            <a:ext cx="3383279" cy="713232"/>
+          </a:xfrm>
+          <a:prstGeom prst="roundRect">
+            <a:avLst>
+              <a:gd name="adj" fmla="val 10000"/>
+            </a:avLst>
+          </a:prstGeom>
+          <a:solidFill>
+            <a:srgbClr val="143258"/>
+          </a:solidFill>
+          <a:ln>
+            <a:noFill/>
+          </a:ln>
+        </p:spPr>
+        <p:style>
+          <a:lnRef idx="1">
+            <a:schemeClr val="accent1"/>
+          </a:lnRef>
+          <a:fillRef idx="3">
+            <a:schemeClr val="accent1"/>
+          </a:fillRef>
+          <a:effectRef idx="2">
+            <a:schemeClr val="accent1"/>
+          </a:effectRef>
+          <a:fontRef idx="minor">
+            <a:schemeClr val="lt1"/>
+          </a:fontRef>
+        </p:style>
+        <p:txBody>
+          <a:bodyPr rtlCol="0" anchor="ctr"/>
+          <a:lstStyle/>
+          <a:p>
+            <a:pPr algn="ctr"/>
+          </a:p>
+        </p:txBody>
+      </p:sp>
+      <p:sp>
+        <p:nvSpPr>
+          <p:cNvPr id="36" name="TextBox 35"/>
+          <p:cNvSpPr txBox="1"/>
+          <p:nvPr/>
+        </p:nvSpPr>
+        <p:spPr>
+          <a:xfrm>
+            <a:off x="8266175" y="3767328"/>
+            <a:ext cx="3383279" cy="201168"/>
+          </a:xfrm>
+          <a:prstGeom prst="rect">
+            <a:avLst/>
+          </a:prstGeom>
+          <a:noFill/>
+        </p:spPr>
+        <p:txBody>
+          <a:bodyPr wrap="square">
+            <a:spAutoFit/>
+          </a:bodyPr>
+          <a:lstStyle/>
+          <a:p>
+            <a:pPr algn="ctr"/>
+            <a:r>
+              <a:rPr sz="1000" b="1">
+                <a:solidFill>
+                  <a:srgbClr val="C5D4E8"/>
+                </a:solidFill>
+                <a:latin typeface="Calibri"/>
+              </a:rPr>
+              <a:t>Motion analysis</a:t>
+            </a:r>
+          </a:p>
+        </p:txBody>
+      </p:sp>
+      <p:sp>
+        <p:nvSpPr>
+          <p:cNvPr id="37" name="Rounded Rectangle 36"/>
+          <p:cNvSpPr/>
+          <p:nvPr/>
+        </p:nvSpPr>
+        <p:spPr>
+          <a:xfrm>
+            <a:off x="8321040" y="4005072"/>
+            <a:ext cx="1609343" cy="384048"/>
+          </a:xfrm>
+          <a:prstGeom prst="roundRect">
+            <a:avLst>
+              <a:gd name="adj" fmla="val 18000"/>
+            </a:avLst>
+          </a:prstGeom>
+          <a:solidFill>
+            <a:srgbClr val="1FB5A6"/>
+          </a:solidFill>
+          <a:ln>
+            <a:noFill/>
+          </a:ln>
+        </p:spPr>
+        <p:style>
+          <a:lnRef idx="1">
+            <a:schemeClr val="accent1"/>
+          </a:lnRef>
+          <a:fillRef idx="3">
+            <a:schemeClr val="accent1"/>
+          </a:fillRef>
+          <a:effectRef idx="2">
+            <a:schemeClr val="accent1"/>
+          </a:effectRef>
+          <a:fontRef idx="minor">
+            <a:schemeClr val="lt1"/>
+          </a:fontRef>
+        </p:style>
+        <p:txBody>
+          <a:bodyPr rtlCol="0" anchor="ctr"/>
+          <a:lstStyle/>
+          <a:p>
+            <a:pPr algn="ctr"/>
+          </a:p>
+        </p:txBody>
+      </p:sp>
+      <p:sp>
+        <p:nvSpPr>
+          <p:cNvPr id="38" name="TextBox 37"/>
+          <p:cNvSpPr txBox="1"/>
+          <p:nvPr/>
+        </p:nvSpPr>
+        <p:spPr>
+          <a:xfrm>
+            <a:off x="8321040" y="4059936"/>
+            <a:ext cx="1609343" cy="274320"/>
+          </a:xfrm>
+          <a:prstGeom prst="rect">
+            <a:avLst/>
+          </a:prstGeom>
+          <a:noFill/>
+        </p:spPr>
+        <p:txBody>
+          <a:bodyPr wrap="square">
+            <a:spAutoFit/>
+          </a:bodyPr>
+          <a:lstStyle/>
+          <a:p>
+            <a:pPr algn="ctr"/>
+            <a:r>
+              <a:rPr sz="1000" b="1">
+                <a:solidFill>
+                  <a:srgbClr val="FFFFFF"/>
+                </a:solidFill>
+                <a:latin typeface="Calibri"/>
+              </a:rPr>
+              <a:t>2D angles</a:t>
+            </a:r>
+          </a:p>
+        </p:txBody>
+      </p:sp>
+      <p:sp>
+        <p:nvSpPr>
+          <p:cNvPr id="39" name="Rounded Rectangle 38"/>
+          <p:cNvSpPr/>
+          <p:nvPr/>
+        </p:nvSpPr>
+        <p:spPr>
+          <a:xfrm>
+            <a:off x="9985248" y="4005072"/>
+            <a:ext cx="1609343" cy="384048"/>
+          </a:xfrm>
+          <a:prstGeom prst="roundRect">
+            <a:avLst>
+              <a:gd name="adj" fmla="val 18000"/>
+            </a:avLst>
+          </a:prstGeom>
+          <a:solidFill>
+            <a:srgbClr val="E8A338"/>
+          </a:solidFill>
+          <a:ln>
+            <a:noFill/>
+          </a:ln>
+        </p:spPr>
+        <p:style>
+          <a:lnRef idx="1">
+            <a:schemeClr val="accent1"/>
+          </a:lnRef>
+          <a:fillRef idx="3">
+            <a:schemeClr val="accent1"/>
+          </a:fillRef>
+          <a:effectRef idx="2">
+            <a:schemeClr val="accent1"/>
+          </a:effectRef>
+          <a:fontRef idx="minor">
+            <a:schemeClr val="lt1"/>
+          </a:fontRef>
+        </p:style>
+        <p:txBody>
+          <a:bodyPr rtlCol="0" anchor="ctr"/>
+          <a:lstStyle/>
+          <a:p>
+            <a:pPr algn="ctr"/>
+          </a:p>
+        </p:txBody>
+      </p:sp>
+      <p:sp>
+        <p:nvSpPr>
+          <p:cNvPr id="40" name="TextBox 39"/>
+          <p:cNvSpPr txBox="1"/>
+          <p:nvPr/>
+        </p:nvSpPr>
+        <p:spPr>
+          <a:xfrm>
+            <a:off x="9985248" y="4059936"/>
+            <a:ext cx="1609343" cy="274320"/>
+          </a:xfrm>
+          <a:prstGeom prst="rect">
+            <a:avLst/>
+          </a:prstGeom>
+          <a:noFill/>
+        </p:spPr>
+        <p:txBody>
+          <a:bodyPr wrap="square">
+            <a:spAutoFit/>
+          </a:bodyPr>
+          <a:lstStyle/>
+          <a:p>
+            <a:pPr algn="ctr"/>
+            <a:r>
+              <a:rPr sz="1000" b="1">
+                <a:solidFill>
+                  <a:srgbClr val="FFFFFF"/>
+                </a:solidFill>
+                <a:latin typeface="Calibri"/>
+              </a:rPr>
+              <a:t>Wrist motion</a:t>
+            </a:r>
+          </a:p>
+        </p:txBody>
+      </p:sp>
+      <p:sp>
+        <p:nvSpPr>
+          <p:cNvPr id="41" name="Down Arrow 40"/>
+          <p:cNvSpPr/>
+          <p:nvPr/>
+        </p:nvSpPr>
+        <p:spPr>
+          <a:xfrm>
+            <a:off x="9857232" y="4471416"/>
+            <a:ext cx="201168" cy="128016"/>
+          </a:xfrm>
+          <a:prstGeom prst="downArrow">
+            <a:avLst/>
+          </a:prstGeom>
+          <a:solidFill>
+            <a:srgbClr val="1FB5A6"/>
+          </a:solidFill>
+          <a:ln>
+            <a:noFill/>
+          </a:ln>
+        </p:spPr>
+        <p:style>
+          <a:lnRef idx="1">
+            <a:schemeClr val="accent1"/>
+          </a:lnRef>
+          <a:fillRef idx="3">
+            <a:schemeClr val="accent1"/>
+          </a:fillRef>
+          <a:effectRef idx="2">
+            <a:schemeClr val="accent1"/>
+          </a:effectRef>
+          <a:fontRef idx="minor">
+            <a:schemeClr val="lt1"/>
+          </a:fontRef>
+        </p:style>
+        <p:txBody>
+          <a:bodyPr rtlCol="0" anchor="ctr"/>
+          <a:lstStyle/>
+          <a:p>
+            <a:pPr algn="ctr"/>
+          </a:p>
+        </p:txBody>
+      </p:sp>
+      <p:sp>
+        <p:nvSpPr>
+          <p:cNvPr id="42" name="Rounded Rectangle 41"/>
+          <p:cNvSpPr/>
+          <p:nvPr/>
+        </p:nvSpPr>
+        <p:spPr>
+          <a:xfrm>
+            <a:off x="8266175" y="4626864"/>
+            <a:ext cx="3383279" cy="438912"/>
+          </a:xfrm>
+          <a:prstGeom prst="roundRect">
+            <a:avLst>
+              <a:gd name="adj" fmla="val 12000"/>
+            </a:avLst>
+          </a:prstGeom>
+          <a:solidFill>
+            <a:srgbClr val="FFFFFF"/>
+          </a:solidFill>
+          <a:ln>
+            <a:noFill/>
+          </a:ln>
+        </p:spPr>
+        <p:style>
+          <a:lnRef idx="1">
+            <a:schemeClr val="accent1"/>
+          </a:lnRef>
+          <a:fillRef idx="3">
+            <a:schemeClr val="accent1"/>
+          </a:fillRef>
+          <a:effectRef idx="2">
+            <a:schemeClr val="accent1"/>
+          </a:effectRef>
+          <a:fontRef idx="minor">
+            <a:schemeClr val="lt1"/>
+          </a:fontRef>
+        </p:style>
+        <p:txBody>
+          <a:bodyPr rtlCol="0" anchor="ctr"/>
+          <a:lstStyle/>
+          <a:p>
+            <a:pPr algn="ctr"/>
+          </a:p>
+        </p:txBody>
+      </p:sp>
+      <p:sp>
+        <p:nvSpPr>
+          <p:cNvPr id="43" name="TextBox 42"/>
+          <p:cNvSpPr txBox="1"/>
+          <p:nvPr/>
+        </p:nvSpPr>
+        <p:spPr>
+          <a:xfrm>
+            <a:off x="8339327" y="4663440"/>
+            <a:ext cx="3236975" cy="384048"/>
+          </a:xfrm>
+          <a:prstGeom prst="rect">
+            <a:avLst/>
+          </a:prstGeom>
+          <a:noFill/>
+        </p:spPr>
+        <p:txBody>
+          <a:bodyPr wrap="square">
+            <a:spAutoFit/>
+          </a:bodyPr>
+          <a:lstStyle/>
+          <a:p>
+            <a:pPr algn="ctr">
+              <a:spcAft>
+                <a:spcPts val="0"/>
+              </a:spcAft>
+            </a:pPr>
+            <a:r>
+              <a:rPr sz="1100" b="1">
+                <a:solidFill>
+                  <a:srgbClr val="1A2332"/>
+                </a:solidFill>
+                <a:latin typeface="Calibri"/>
+              </a:rPr>
+              <a:t>Visualization</a:t>
+            </a:r>
+          </a:p>
+          <a:p>
+            <a:pPr algn="ctr">
+              <a:spcAft>
+                <a:spcPts val="0"/>
+              </a:spcAft>
+            </a:pPr>
+            <a:r>
+              <a:rPr sz="1100" b="1">
+                <a:solidFill>
+                  <a:srgbClr val="1A2332"/>
+                </a:solidFill>
+                <a:latin typeface="Calibri"/>
+              </a:rPr>
+              <a:t>&amp; reporting</a:t>
+            </a:r>
+          </a:p>
+        </p:txBody>
+      </p:sp>
+      <p:sp>
+        <p:nvSpPr>
+          <p:cNvPr id="44" name="Down Arrow 43"/>
+          <p:cNvSpPr/>
+          <p:nvPr/>
+        </p:nvSpPr>
+        <p:spPr>
+          <a:xfrm>
+            <a:off x="9857232" y="5074920"/>
+            <a:ext cx="201168" cy="128016"/>
+          </a:xfrm>
+          <a:prstGeom prst="downArrow">
+            <a:avLst/>
+          </a:prstGeom>
+          <a:solidFill>
+            <a:srgbClr val="1FB5A6"/>
+          </a:solidFill>
+          <a:ln>
+            <a:noFill/>
+          </a:ln>
+        </p:spPr>
+        <p:style>
+          <a:lnRef idx="1">
+            <a:schemeClr val="accent1"/>
+          </a:lnRef>
+          <a:fillRef idx="3">
+            <a:schemeClr val="accent1"/>
+          </a:fillRef>
+          <a:effectRef idx="2">
+            <a:schemeClr val="accent1"/>
+          </a:effectRef>
+          <a:fontRef idx="minor">
+            <a:schemeClr val="lt1"/>
+          </a:fontRef>
+        </p:style>
+        <p:txBody>
+          <a:bodyPr rtlCol="0" anchor="ctr"/>
+          <a:lstStyle/>
+          <a:p>
+            <a:pPr algn="ctr"/>
+          </a:p>
+        </p:txBody>
+      </p:sp>
+      <p:sp>
+        <p:nvSpPr>
+          <p:cNvPr id="45" name="Rounded Rectangle 44"/>
+          <p:cNvSpPr/>
+          <p:nvPr/>
+        </p:nvSpPr>
+        <p:spPr>
+          <a:xfrm>
+            <a:off x="8266175" y="5230368"/>
+            <a:ext cx="3383279" cy="438912"/>
+          </a:xfrm>
+          <a:prstGeom prst="roundRect">
+            <a:avLst>
+              <a:gd name="adj" fmla="val 12000"/>
+            </a:avLst>
+          </a:prstGeom>
+          <a:solidFill>
+            <a:srgbClr val="FFFFFF"/>
+          </a:solidFill>
+          <a:ln>
+            <a:noFill/>
+          </a:ln>
+        </p:spPr>
+        <p:style>
+          <a:lnRef idx="1">
+            <a:schemeClr val="accent1"/>
+          </a:lnRef>
+          <a:fillRef idx="3">
+            <a:schemeClr val="accent1"/>
+          </a:fillRef>
+          <a:effectRef idx="2">
+            <a:schemeClr val="accent1"/>
+          </a:effectRef>
+          <a:fontRef idx="minor">
+            <a:schemeClr val="lt1"/>
+          </a:fontRef>
+        </p:style>
+        <p:txBody>
+          <a:bodyPr rtlCol="0" anchor="ctr"/>
+          <a:lstStyle/>
+          <a:p>
+            <a:pPr algn="ctr"/>
+          </a:p>
+        </p:txBody>
+      </p:sp>
+      <p:sp>
+        <p:nvSpPr>
+          <p:cNvPr id="46" name="TextBox 45"/>
+          <p:cNvSpPr txBox="1"/>
+          <p:nvPr/>
+        </p:nvSpPr>
+        <p:spPr>
+          <a:xfrm>
+            <a:off x="8339327" y="5266944"/>
+            <a:ext cx="3236975" cy="384048"/>
+          </a:xfrm>
+          <a:prstGeom prst="rect">
+            <a:avLst/>
+          </a:prstGeom>
+          <a:noFill/>
+        </p:spPr>
+        <p:txBody>
+          <a:bodyPr wrap="square">
+            <a:spAutoFit/>
+          </a:bodyPr>
+          <a:lstStyle/>
+          <a:p>
+            <a:pPr algn="ctr">
+              <a:spcAft>
+                <a:spcPts val="0"/>
+              </a:spcAft>
+            </a:pPr>
+            <a:r>
+              <a:rPr sz="1100" b="1">
+                <a:solidFill>
+                  <a:srgbClr val="1A2332"/>
+                </a:solidFill>
+                <a:latin typeface="Calibri"/>
+              </a:rPr>
+              <a:t>CSV  /  video  /  report</a:t>
+            </a:r>
+          </a:p>
+        </p:txBody>
+      </p:sp>
+      <p:sp>
+        <p:nvSpPr>
+          <p:cNvPr id="47" name="Rounded Rectangle 46"/>
+          <p:cNvSpPr/>
+          <p:nvPr/>
+        </p:nvSpPr>
+        <p:spPr>
+          <a:xfrm>
+            <a:off x="347472" y="5998464"/>
+            <a:ext cx="11484864" cy="420624"/>
           </a:xfrm>
           <a:prstGeom prst="roundRect">
             <a:avLst>
@@ -7267,7 +9489,7 @@
             </a:avLst>
           </a:prstGeom>
           <a:solidFill>
-            <a:srgbClr val="FFFFFF"/>
+            <a:srgbClr val="0B1F3A"/>
           </a:solidFill>
           <a:ln w="12700">
             <a:solidFill>
@@ -7299,20 +9521,55 @@
       </p:sp>
       <p:sp>
         <p:nvSpPr>
-          <p:cNvPr id="34" name="Rectangle 33"/>
+          <p:cNvPr id="48" name="TextBox 47"/>
+          <p:cNvSpPr txBox="1"/>
+          <p:nvPr/>
+        </p:nvSpPr>
+        <p:spPr>
+          <a:xfrm>
+            <a:off x="457200" y="6071616"/>
+            <a:ext cx="11265408" cy="292608"/>
+          </a:xfrm>
+          <a:prstGeom prst="rect">
+            <a:avLst/>
+          </a:prstGeom>
+          <a:noFill/>
+        </p:spPr>
+        <p:txBody>
+          <a:bodyPr wrap="square">
+            <a:spAutoFit/>
+          </a:bodyPr>
+          <a:lstStyle/>
+          <a:p>
+            <a:pPr algn="ctr"/>
+            <a:r>
+              <a:rPr sz="1300" b="1">
+                <a:solidFill>
+                  <a:srgbClr val="FFFFFF"/>
+                </a:solidFill>
+                <a:latin typeface="Calibri"/>
+              </a:rPr>
+              <a:t>Built as a modular pipeline   →   ready for RealSense depth integration in the 3D phase.</a:t>
+            </a:r>
+          </a:p>
+        </p:txBody>
+      </p:sp>
+      <p:sp>
+        <p:nvSpPr>
+          <p:cNvPr id="49" name="Rectangle 48"/>
           <p:cNvSpPr/>
           <p:nvPr/>
         </p:nvSpPr>
         <p:spPr>
           <a:xfrm>
-            <a:off x="8220456" y="3886199"/>
-            <a:ext cx="3703320" cy="82296"/>
-          </a:xfrm>
-          <a:prstGeom prst="rect">
-            <a:avLst/>
-          </a:prstGeom>
-          <a:solidFill>
-            <a:srgbClr val="E8A338"/>
+            <a:off x="0" y="6510528"/>
+            <a:ext cx="12191695" cy="347472"/>
+          </a:xfrm>
+          <a:prstGeom prst="rect">
+            <a:avLst/>
+          </a:prstGeom>
+          <a:solidFill>
+            <a:srgbClr val="0B1F3A"/>
           </a:solidFill>
           <a:ln>
             <a:noFill/>
@@ -7342,14 +9599,14 @@
       </p:sp>
       <p:sp>
         <p:nvSpPr>
-          <p:cNvPr id="35" name="TextBox 34"/>
+          <p:cNvPr id="50" name="TextBox 49"/>
           <p:cNvSpPr txBox="1"/>
           <p:nvPr/>
         </p:nvSpPr>
         <p:spPr>
           <a:xfrm>
-            <a:off x="8403336" y="4069079"/>
-            <a:ext cx="3337560" cy="256032"/>
+            <a:off x="457200" y="6547104"/>
+            <a:ext cx="11247120" cy="274320"/>
           </a:xfrm>
           <a:prstGeom prst="rect">
             <a:avLst/>
@@ -7363,260 +9620,13 @@
           <a:lstStyle/>
           <a:p>
             <a:r>
-              <a:rPr sz="1100" b="1">
-                <a:solidFill>
-                  <a:srgbClr val="E8A338"/>
+              <a:rPr sz="1100" b="0">
+                <a:solidFill>
+                  <a:srgbClr val="FFFFFF"/>
                 </a:solidFill>
                 <a:latin typeface="Calibri"/>
               </a:rPr>
-              <a:t>DATA OUT</a:t>
-            </a:r>
-          </a:p>
-        </p:txBody>
-      </p:sp>
-      <p:sp>
-        <p:nvSpPr>
-          <p:cNvPr id="36" name="TextBox 35"/>
-          <p:cNvSpPr txBox="1"/>
-          <p:nvPr/>
-        </p:nvSpPr>
-        <p:spPr>
-          <a:xfrm>
-            <a:off x="8403336" y="4325111"/>
-            <a:ext cx="3337560" cy="347472"/>
-          </a:xfrm>
-          <a:prstGeom prst="rect">
-            <a:avLst/>
-          </a:prstGeom>
-          <a:noFill/>
-        </p:spPr>
-        <p:txBody>
-          <a:bodyPr wrap="none">
-            <a:spAutoFit/>
-          </a:bodyPr>
-          <a:lstStyle/>
-          <a:p>
-            <a:r>
-              <a:rPr sz="1600" b="1">
-                <a:solidFill>
-                  <a:srgbClr val="1A2332"/>
-                </a:solidFill>
-                <a:latin typeface="Calibri"/>
-              </a:rPr>
-              <a:t>CSV + MP4</a:t>
-            </a:r>
-          </a:p>
-        </p:txBody>
-      </p:sp>
-      <p:sp>
-        <p:nvSpPr>
-          <p:cNvPr id="37" name="TextBox 36"/>
-          <p:cNvSpPr txBox="1"/>
-          <p:nvPr/>
-        </p:nvSpPr>
-        <p:spPr>
-          <a:xfrm>
-            <a:off x="8403336" y="4727447"/>
-            <a:ext cx="3337560" cy="868680"/>
-          </a:xfrm>
-          <a:prstGeom prst="rect">
-            <a:avLst/>
-          </a:prstGeom>
-          <a:noFill/>
-        </p:spPr>
-        <p:txBody>
-          <a:bodyPr wrap="square">
-            <a:spAutoFit/>
-          </a:bodyPr>
-          <a:lstStyle/>
-          <a:p>
-            <a:pPr>
-              <a:spcAft>
-                <a:spcPts val="200"/>
-              </a:spcAft>
-            </a:pPr>
-            <a:r>
-              <a:rPr sz="1300" b="0">
-                <a:solidFill>
-                  <a:srgbClr val="5A6678"/>
-                </a:solidFill>
-                <a:latin typeface="Calibri"/>
-              </a:rPr>
-              <a:t>keypoints_2d.csv</a:t>
-            </a:r>
-          </a:p>
-          <a:p>
-            <a:pPr>
-              <a:spcAft>
-                <a:spcPts val="200"/>
-              </a:spcAft>
-            </a:pPr>
-            <a:r>
-              <a:rPr sz="1300" b="0">
-                <a:solidFill>
-                  <a:srgbClr val="5A6678"/>
-                </a:solidFill>
-                <a:latin typeface="Calibri"/>
-              </a:rPr>
-              <a:t>angles_2d.csv  ·  overlay.mp4</a:t>
-            </a:r>
-          </a:p>
-        </p:txBody>
-      </p:sp>
-      <p:sp>
-        <p:nvSpPr>
-          <p:cNvPr id="38" name="Rounded Rectangle 37"/>
-          <p:cNvSpPr/>
-          <p:nvPr/>
-        </p:nvSpPr>
-        <p:spPr>
-          <a:xfrm>
-            <a:off x="411480" y="5925312"/>
-            <a:ext cx="11365992" cy="475488"/>
-          </a:xfrm>
-          <a:prstGeom prst="roundRect">
-            <a:avLst>
-              <a:gd name="adj" fmla="val 8000"/>
-            </a:avLst>
-          </a:prstGeom>
-          <a:solidFill>
-            <a:srgbClr val="0B1F3A"/>
-          </a:solidFill>
-          <a:ln w="12700">
-            <a:solidFill>
-              <a:srgbClr val="E4E0D8"/>
-            </a:solidFill>
-          </a:ln>
-        </p:spPr>
-        <p:style>
-          <a:lnRef idx="1">
-            <a:schemeClr val="accent1"/>
-          </a:lnRef>
-          <a:fillRef idx="3">
-            <a:schemeClr val="accent1"/>
-          </a:fillRef>
-          <a:effectRef idx="2">
-            <a:schemeClr val="accent1"/>
-          </a:effectRef>
-          <a:fontRef idx="minor">
-            <a:schemeClr val="lt1"/>
-          </a:fontRef>
-        </p:style>
-        <p:txBody>
-          <a:bodyPr rtlCol="0" anchor="ctr"/>
-          <a:lstStyle/>
-          <a:p>
-            <a:pPr algn="ctr"/>
-          </a:p>
-        </p:txBody>
-      </p:sp>
-      <p:sp>
-        <p:nvSpPr>
-          <p:cNvPr id="39" name="TextBox 38"/>
-          <p:cNvSpPr txBox="1"/>
-          <p:nvPr/>
-        </p:nvSpPr>
-        <p:spPr>
-          <a:xfrm>
-            <a:off x="594360" y="5998464"/>
-            <a:ext cx="11018520" cy="347472"/>
-          </a:xfrm>
-          <a:prstGeom prst="rect">
-            <a:avLst/>
-          </a:prstGeom>
-          <a:noFill/>
-        </p:spPr>
-        <p:txBody>
-          <a:bodyPr wrap="none">
-            <a:spAutoFit/>
-          </a:bodyPr>
-          <a:lstStyle/>
-          <a:p>
-            <a:r>
-              <a:rPr sz="1300" b="0">
-                <a:solidFill>
-                  <a:srgbClr val="FFFFFF"/>
-                </a:solidFill>
-                <a:latin typeface="Calibri"/>
-              </a:rPr>
-              <a:t>Not used as 3D: MediaPipe world landmarks (RGB-only guess).  Real 3D = RealSense depth at these 2D pixels.  Close Viewer before Live.</a:t>
-            </a:r>
-          </a:p>
-        </p:txBody>
-      </p:sp>
-      <p:sp>
-        <p:nvSpPr>
-          <p:cNvPr id="40" name="Rectangle 39"/>
-          <p:cNvSpPr/>
-          <p:nvPr/>
-        </p:nvSpPr>
-        <p:spPr>
-          <a:xfrm>
-            <a:off x="0" y="6510528"/>
-            <a:ext cx="12191695" cy="347472"/>
-          </a:xfrm>
-          <a:prstGeom prst="rect">
-            <a:avLst/>
-          </a:prstGeom>
-          <a:solidFill>
-            <a:srgbClr val="0B1F3A"/>
-          </a:solidFill>
-          <a:ln>
-            <a:noFill/>
-          </a:ln>
-        </p:spPr>
-        <p:style>
-          <a:lnRef idx="1">
-            <a:schemeClr val="accent1"/>
-          </a:lnRef>
-          <a:fillRef idx="3">
-            <a:schemeClr val="accent1"/>
-          </a:fillRef>
-          <a:effectRef idx="2">
-            <a:schemeClr val="accent1"/>
-          </a:effectRef>
-          <a:fontRef idx="minor">
-            <a:schemeClr val="lt1"/>
-          </a:fontRef>
-        </p:style>
-        <p:txBody>
-          <a:bodyPr rtlCol="0" anchor="ctr"/>
-          <a:lstStyle/>
-          <a:p>
-            <a:pPr algn="ctr"/>
-          </a:p>
-        </p:txBody>
-      </p:sp>
-      <p:sp>
-        <p:nvSpPr>
-          <p:cNvPr id="41" name="TextBox 40"/>
-          <p:cNvSpPr txBox="1"/>
-          <p:nvPr/>
-        </p:nvSpPr>
-        <p:spPr>
-          <a:xfrm>
-            <a:off x="457200" y="6547104"/>
-            <a:ext cx="11247120" cy="274320"/>
-          </a:xfrm>
-          <a:prstGeom prst="rect">
-            <a:avLst/>
-          </a:prstGeom>
-          <a:noFill/>
-        </p:spPr>
-        <p:txBody>
-          <a:bodyPr wrap="none">
-            <a:spAutoFit/>
-          </a:bodyPr>
-          <a:lstStyle/>
-          <a:p>
-            <a:r>
-              <a:rPr sz="1100" b="0">
-                <a:solidFill>
-                  <a:srgbClr val="FFFFFF"/>
-                </a:solidFill>
-                <a:latin typeface="Calibri"/>
-              </a:rPr>
-              <a:t>Jay   ·   IIT Guwahati   ·   python app.py   ·   USB 3  ·  close RealSense Viewer</a:t>
+              <a:t>Jay   ·   IIT Guwahati   ·   python app.py   ·   config.yaml   ·   2D implemented, 3D not claimed</a:t>
             </a:r>
           </a:p>
         </p:txBody>
